--- a/python-course-ppt/逐节课件/Python讲授课件-单元15.pptx
+++ b/python-course-ppt/逐节课件/Python讲授课件-单元15.pptx
@@ -335,6 +335,86 @@
           </a:p>
         </p:txBody>
       </p:sp>
+      <p:sp>
+        <p:nvSpPr>
+          <p:cNvPr id="2" name="讲课提示"/>
+          <p:cNvSpPr txBox="1"/>
+          <p:nvPr/>
+        </p:nvSpPr>
+        <p:spPr>
+          <a:xfrm>
+            <a:off x="457200" y="457200"/>
+            <a:ext cx="6858000" cy="4800600"/>
+          </a:xfrm>
+          <a:prstGeom prst="rect">
+            <a:avLst/>
+          </a:prstGeom>
+        </p:spPr>
+        <p:txBody>
+          <a:bodyPr wrap="square"/>
+          <a:lstStyle/>
+          <a:p>
+            <a:r>
+              <a:rPr lang="zh-CN" dirty="0"/>
+              <a:t>单元 15 · 单元 15 · Matplotlib 生成数据</a:t>
+            </a:r>
+          </a:p>
+          <a:p>
+            <a:r>
+              <a:rPr lang="zh-CN" dirty="0"/>
+              <a:t/>
+            </a:r>
+          </a:p>
+          <a:p>
+            <a:r>
+              <a:rPr lang="zh-CN" dirty="0"/>
+              <a:t>本单元包含以下课节：</a:t>
+            </a:r>
+          </a:p>
+          <a:p>
+            <a:r>
+              <a:rPr lang="zh-CN" dirty="0"/>
+              <a:t>· 第 79 节 Matplotlib 入门与折线图</a:t>
+            </a:r>
+          </a:p>
+          <a:p>
+            <a:r>
+              <a:rPr lang="zh-CN" dirty="0"/>
+              <a:t>· 第 80 节 散点图与自动计算数据</a:t>
+            </a:r>
+          </a:p>
+          <a:p>
+            <a:r>
+              <a:rPr lang="zh-CN" dirty="0"/>
+              <a:t>· 第 81 节 ★ 校正绘图、刻度与颜色映射</a:t>
+            </a:r>
+          </a:p>
+          <a:p>
+            <a:r>
+              <a:rPr lang="zh-CN" dirty="0"/>
+              <a:t>· 第 82 节 随机游走 RandomWalk 类</a:t>
+            </a:r>
+          </a:p>
+          <a:p>
+            <a:r>
+              <a:rPr lang="zh-CN" dirty="0"/>
+              <a:t>· 第 83 节 Plotly 掷骰子与动手实战</a:t>
+            </a:r>
+          </a:p>
+          <a:p>
+            <a:r>
+              <a:rPr lang="zh-CN" dirty="0"/>
+              <a:t/>
+            </a:r>
+          </a:p>
+          <a:p>
+            <a:r>
+              <a:rPr lang="zh-CN" dirty="0"/>
+              <a:t>开场用 3 分钟讲清：这个单元学完能做出什么，最后会被关卡怎么验。</a:t>
+            </a:r>
+          </a:p>
+        </p:txBody>
+      </p:sp>
     </p:spTree>
   </p:cSld>
   <p:clrMapOvr>
@@ -458,6 +538,104 @@
           </a:p>
         </p:txBody>
       </p:sp>
+      <p:sp>
+        <p:nvSpPr>
+          <p:cNvPr id="2" name="讲课提示"/>
+          <p:cNvSpPr txBox="1"/>
+          <p:nvPr/>
+        </p:nvSpPr>
+        <p:spPr>
+          <a:xfrm>
+            <a:off x="457200" y="457200"/>
+            <a:ext cx="6858000" cy="4800600"/>
+          </a:xfrm>
+          <a:prstGeom prst="rect">
+            <a:avLst/>
+          </a:prstGeom>
+        </p:spPr>
+        <p:txBody>
+          <a:bodyPr wrap="square"/>
+          <a:lstStyle/>
+          <a:p>
+            <a:r>
+              <a:rPr lang="zh-CN" dirty="0"/>
+              <a:t>第 83 节 · Plotly 掷骰子与动手实战</a:t>
+            </a:r>
+          </a:p>
+          <a:p>
+            <a:r>
+              <a:rPr lang="zh-CN" dirty="0"/>
+              <a:t>单元 15 · Matplotlib 生成数据 · W19</a:t>
+            </a:r>
+          </a:p>
+          <a:p>
+            <a:r>
+              <a:rPr lang="zh-CN" dirty="0"/>
+              <a:t/>
+            </a:r>
+          </a:p>
+          <a:p>
+            <a:r>
+              <a:rPr lang="zh-CN" dirty="0"/>
+              <a:t>学习目标：会用 Plotly 的 Die 类与 px.bar 画直方图；能比较两个骰子的分布</a:t>
+            </a:r>
+          </a:p>
+          <a:p>
+            <a:r>
+              <a:rPr lang="zh-CN" dirty="0"/>
+              <a:t/>
+            </a:r>
+          </a:p>
+          <a:p>
+            <a:r>
+              <a:rPr lang="zh-CN" dirty="0"/>
+              <a:t>课堂实操（40 分钟，不看答案）：</a:t>
+            </a:r>
+          </a:p>
+          <a:p>
+            <a:r>
+              <a:rPr lang="zh-CN" dirty="0"/>
+              <a:t>· 实现 Die 类并掷 1000 次</a:t>
+            </a:r>
+          </a:p>
+          <a:p>
+            <a:r>
+              <a:rPr lang="zh-CN" dirty="0"/>
+              <a:t>· 同时掷两个面数不同的骰子，对比分布</a:t>
+            </a:r>
+          </a:p>
+          <a:p>
+            <a:r>
+              <a:rPr lang="zh-CN" dirty="0"/>
+              <a:t/>
+            </a:r>
+          </a:p>
+          <a:p>
+            <a:r>
+              <a:rPr lang="zh-CN" dirty="0"/>
+              <a:t>课后作业：</a:t>
+            </a:r>
+          </a:p>
+          <a:p>
+            <a:r>
+              <a:rPr lang="zh-CN" dirty="0"/>
+              <a:t>· ★ 产出：掷骰子分布图（可交互 HTML）</a:t>
+            </a:r>
+          </a:p>
+          <a:p>
+            <a:r>
+              <a:rPr lang="zh-CN" dirty="0"/>
+              <a:t/>
+            </a:r>
+          </a:p>
+          <a:p>
+            <a:r>
+              <a:rPr lang="zh-CN" dirty="0"/>
+              <a:t>节奏：讲 20 分钟 → 学员自己敲 40 分钟（不看答案）→ 对讲评自查 20 分钟 → 写作业 10 分钟。</a:t>
+            </a:r>
+          </a:p>
+        </p:txBody>
+      </p:sp>
     </p:spTree>
   </p:cSld>
   <p:clrMapOvr>
@@ -551,6 +729,74 @@
           </a:p>
         </p:txBody>
       </p:sp>
+      <p:sp>
+        <p:nvSpPr>
+          <p:cNvPr id="2" name="讲课提示"/>
+          <p:cNvSpPr txBox="1"/>
+          <p:nvPr/>
+        </p:nvSpPr>
+        <p:spPr>
+          <a:xfrm>
+            <a:off x="457200" y="457200"/>
+            <a:ext cx="6858000" cy="4800600"/>
+          </a:xfrm>
+          <a:prstGeom prst="rect">
+            <a:avLst/>
+          </a:prstGeom>
+        </p:spPr>
+        <p:txBody>
+          <a:bodyPr wrap="square"/>
+          <a:lstStyle/>
+          <a:p>
+            <a:r>
+              <a:rPr lang="zh-CN" dirty="0"/>
+              <a:t>第 83 节 · 核心知识点：Plotly 掷骰子与动手实战</a:t>
+            </a:r>
+          </a:p>
+          <a:p>
+            <a:r>
+              <a:rPr lang="zh-CN" dirty="0"/>
+              <a:t/>
+            </a:r>
+          </a:p>
+          <a:p>
+            <a:r>
+              <a:rPr lang="zh-CN" dirty="0"/>
+              <a:t>讲这一页时：先让学生说出上节课的结论，再逐块讲要点。</a:t>
+            </a:r>
+          </a:p>
+          <a:p>
+            <a:r>
+              <a:rPr lang="zh-CN" dirty="0"/>
+              <a:t>每讲完一块，问一句「这一步如果写错了，报错会长什么样？」——把错误提前讲。</a:t>
+            </a:r>
+          </a:p>
+          <a:p>
+            <a:r>
+              <a:rPr lang="zh-CN" dirty="0"/>
+              <a:t/>
+            </a:r>
+          </a:p>
+          <a:p>
+            <a:r>
+              <a:rPr lang="zh-CN" dirty="0"/>
+              <a:t>本节目标：会用 Plotly 的 Die 类与 px.bar 画直方图；能比较两个骰子的分布</a:t>
+            </a:r>
+          </a:p>
+          <a:p>
+            <a:r>
+              <a:rPr lang="zh-CN" dirty="0"/>
+              <a:t/>
+            </a:r>
+          </a:p>
+          <a:p>
+            <a:r>
+              <a:rPr lang="zh-CN" dirty="0"/>
+              <a:t>看不到懂的地方，回讲义对应小节读一遍，再回来对着这页复述一次——能讲出来才算真懂。</a:t>
+            </a:r>
+          </a:p>
+        </p:txBody>
+      </p:sp>
     </p:spTree>
   </p:cSld>
   <p:clrMapOvr>
@@ -620,6 +866,50 @@
           </a:p>
         </p:txBody>
       </p:sp>
+      <p:sp>
+        <p:nvSpPr>
+          <p:cNvPr id="2" name="讲课提示"/>
+          <p:cNvSpPr txBox="1"/>
+          <p:nvPr/>
+        </p:nvSpPr>
+        <p:spPr>
+          <a:xfrm>
+            <a:off x="457200" y="457200"/>
+            <a:ext cx="6858000" cy="4800600"/>
+          </a:xfrm>
+          <a:prstGeom prst="rect">
+            <a:avLst/>
+          </a:prstGeom>
+        </p:spPr>
+        <p:txBody>
+          <a:bodyPr wrap="square"/>
+          <a:lstStyle/>
+          <a:p>
+            <a:r>
+              <a:rPr lang="zh-CN" dirty="0"/>
+              <a:t>单元 15 小结 · 单元 15 · 小结</a:t>
+            </a:r>
+          </a:p>
+          <a:p>
+            <a:r>
+              <a:rPr lang="zh-CN" dirty="0"/>
+              <a:t/>
+            </a:r>
+          </a:p>
+          <a:p>
+            <a:r>
+              <a:rPr lang="zh-CN" dirty="0"/>
+              <a:t>收尾动作：让学生合上讲义，口述本单元三个最重要的结论；说不出来的，回对应课节。</a:t>
+            </a:r>
+          </a:p>
+          <a:p>
+            <a:r>
+              <a:rPr lang="zh-CN" dirty="0"/>
+              <a:t>然后当场勾一遍本单元课节的「已完成」，没打勾的进下一单元前补掉。</a:t>
+            </a:r>
+          </a:p>
+        </p:txBody>
+      </p:sp>
     </p:spTree>
   </p:cSld>
   <p:clrMapOvr>
@@ -743,6 +1033,104 @@
           </a:p>
         </p:txBody>
       </p:sp>
+      <p:sp>
+        <p:nvSpPr>
+          <p:cNvPr id="2" name="讲课提示"/>
+          <p:cNvSpPr txBox="1"/>
+          <p:nvPr/>
+        </p:nvSpPr>
+        <p:spPr>
+          <a:xfrm>
+            <a:off x="457200" y="457200"/>
+            <a:ext cx="6858000" cy="4800600"/>
+          </a:xfrm>
+          <a:prstGeom prst="rect">
+            <a:avLst/>
+          </a:prstGeom>
+        </p:spPr>
+        <p:txBody>
+          <a:bodyPr wrap="square"/>
+          <a:lstStyle/>
+          <a:p>
+            <a:r>
+              <a:rPr lang="zh-CN" dirty="0"/>
+              <a:t>第 79 节 · Matplotlib 入门与折线图</a:t>
+            </a:r>
+          </a:p>
+          <a:p>
+            <a:r>
+              <a:rPr lang="zh-CN" dirty="0"/>
+              <a:t>单元 15 · Matplotlib 生成数据 · W18</a:t>
+            </a:r>
+          </a:p>
+          <a:p>
+            <a:r>
+              <a:rPr lang="zh-CN" dirty="0"/>
+              <a:t/>
+            </a:r>
+          </a:p>
+          <a:p>
+            <a:r>
+              <a:rPr lang="zh-CN" dirty="0"/>
+              <a:t>学习目标：会用 `fig, ax = plt.subplots()` 画折线图；知道为什么该用面向对象写法</a:t>
+            </a:r>
+          </a:p>
+          <a:p>
+            <a:r>
+              <a:rPr lang="zh-CN" dirty="0"/>
+              <a:t/>
+            </a:r>
+          </a:p>
+          <a:p>
+            <a:r>
+              <a:rPr lang="zh-CN" dirty="0"/>
+              <a:t>课堂实操（40 分钟，不看答案）：</a:t>
+            </a:r>
+          </a:p>
+          <a:p>
+            <a:r>
+              <a:rPr lang="zh-CN" dirty="0"/>
+              <a:t>· 画出第一条折线图并加标签</a:t>
+            </a:r>
+          </a:p>
+          <a:p>
+            <a:r>
+              <a:rPr lang="zh-CN" dirty="0"/>
+              <a:t>· 把 plt.plot() 写法改成 fig, ax 写法对比</a:t>
+            </a:r>
+          </a:p>
+          <a:p>
+            <a:r>
+              <a:rPr lang="zh-CN" dirty="0"/>
+              <a:t/>
+            </a:r>
+          </a:p>
+          <a:p>
+            <a:r>
+              <a:rPr lang="zh-CN" dirty="0"/>
+              <a:t>课后作业：</a:t>
+            </a:r>
+          </a:p>
+          <a:p>
+            <a:r>
+              <a:rPr lang="zh-CN" dirty="0"/>
+              <a:t>· 装好 matplotlib 并画出第一张图</a:t>
+            </a:r>
+          </a:p>
+          <a:p>
+            <a:r>
+              <a:rPr lang="zh-CN" dirty="0"/>
+              <a:t/>
+            </a:r>
+          </a:p>
+          <a:p>
+            <a:r>
+              <a:rPr lang="zh-CN" dirty="0"/>
+              <a:t>节奏：讲 20 分钟 → 学员自己敲 40 分钟（不看答案）→ 对讲评自查 20 分钟 → 写作业 10 分钟。</a:t>
+            </a:r>
+          </a:p>
+        </p:txBody>
+      </p:sp>
     </p:spTree>
   </p:cSld>
   <p:clrMapOvr>
@@ -836,6 +1224,74 @@
           </a:p>
         </p:txBody>
       </p:sp>
+      <p:sp>
+        <p:nvSpPr>
+          <p:cNvPr id="2" name="讲课提示"/>
+          <p:cNvSpPr txBox="1"/>
+          <p:nvPr/>
+        </p:nvSpPr>
+        <p:spPr>
+          <a:xfrm>
+            <a:off x="457200" y="457200"/>
+            <a:ext cx="6858000" cy="4800600"/>
+          </a:xfrm>
+          <a:prstGeom prst="rect">
+            <a:avLst/>
+          </a:prstGeom>
+        </p:spPr>
+        <p:txBody>
+          <a:bodyPr wrap="square"/>
+          <a:lstStyle/>
+          <a:p>
+            <a:r>
+              <a:rPr lang="zh-CN" dirty="0"/>
+              <a:t>第 79 节 · 核心知识点：Matplotlib 入门与折线图</a:t>
+            </a:r>
+          </a:p>
+          <a:p>
+            <a:r>
+              <a:rPr lang="zh-CN" dirty="0"/>
+              <a:t/>
+            </a:r>
+          </a:p>
+          <a:p>
+            <a:r>
+              <a:rPr lang="zh-CN" dirty="0"/>
+              <a:t>讲这一页时：先让学生说出上节课的结论，再逐块讲要点。</a:t>
+            </a:r>
+          </a:p>
+          <a:p>
+            <a:r>
+              <a:rPr lang="zh-CN" dirty="0"/>
+              <a:t>每讲完一块，问一句「这一步如果写错了，报错会长什么样？」——把错误提前讲。</a:t>
+            </a:r>
+          </a:p>
+          <a:p>
+            <a:r>
+              <a:rPr lang="zh-CN" dirty="0"/>
+              <a:t/>
+            </a:r>
+          </a:p>
+          <a:p>
+            <a:r>
+              <a:rPr lang="zh-CN" dirty="0"/>
+              <a:t>本节目标：会用 `fig, ax = plt.subplots()` 画折线图；知道为什么该用面向对象写法</a:t>
+            </a:r>
+          </a:p>
+          <a:p>
+            <a:r>
+              <a:rPr lang="zh-CN" dirty="0"/>
+              <a:t/>
+            </a:r>
+          </a:p>
+          <a:p>
+            <a:r>
+              <a:rPr lang="zh-CN" dirty="0"/>
+              <a:t>看不到懂的地方，回讲义对应小节读一遍，再回来对着这页复述一次——能讲出来才算真懂。</a:t>
+            </a:r>
+          </a:p>
+        </p:txBody>
+      </p:sp>
     </p:spTree>
   </p:cSld>
   <p:clrMapOvr>
@@ -959,6 +1415,104 @@
           </a:p>
         </p:txBody>
       </p:sp>
+      <p:sp>
+        <p:nvSpPr>
+          <p:cNvPr id="2" name="讲课提示"/>
+          <p:cNvSpPr txBox="1"/>
+          <p:nvPr/>
+        </p:nvSpPr>
+        <p:spPr>
+          <a:xfrm>
+            <a:off x="457200" y="457200"/>
+            <a:ext cx="6858000" cy="4800600"/>
+          </a:xfrm>
+          <a:prstGeom prst="rect">
+            <a:avLst/>
+          </a:prstGeom>
+        </p:spPr>
+        <p:txBody>
+          <a:bodyPr wrap="square"/>
+          <a:lstStyle/>
+          <a:p>
+            <a:r>
+              <a:rPr lang="zh-CN" dirty="0"/>
+              <a:t>第 80 节 · 散点图与自动计算数据</a:t>
+            </a:r>
+          </a:p>
+          <a:p>
+            <a:r>
+              <a:rPr lang="zh-CN" dirty="0"/>
+              <a:t>单元 15 · Matplotlib 生成数据 · W18</a:t>
+            </a:r>
+          </a:p>
+          <a:p>
+            <a:r>
+              <a:rPr lang="zh-CN" dirty="0"/>
+              <a:t/>
+            </a:r>
+          </a:p>
+          <a:p>
+            <a:r>
+              <a:rPr lang="zh-CN" dirty="0"/>
+              <a:t>学习目标：掌握 scatter 的 s / c 两件套；会生成随机数据</a:t>
+            </a:r>
+          </a:p>
+          <a:p>
+            <a:r>
+              <a:rPr lang="zh-CN" dirty="0"/>
+              <a:t/>
+            </a:r>
+          </a:p>
+          <a:p>
+            <a:r>
+              <a:rPr lang="zh-CN" dirty="0"/>
+              <a:t>课堂实操（40 分钟，不看答案）：</a:t>
+            </a:r>
+          </a:p>
+          <a:p>
+            <a:r>
+              <a:rPr lang="zh-CN" dirty="0"/>
+              <a:t>· 画一张散点图并设置点大小</a:t>
+            </a:r>
+          </a:p>
+          <a:p>
+            <a:r>
+              <a:rPr lang="zh-CN" dirty="0"/>
+              <a:t>· 故意不设 s，看点为什么看起来一样大</a:t>
+            </a:r>
+          </a:p>
+          <a:p>
+            <a:r>
+              <a:rPr lang="zh-CN" dirty="0"/>
+              <a:t/>
+            </a:r>
+          </a:p>
+          <a:p>
+            <a:r>
+              <a:rPr lang="zh-CN" dirty="0"/>
+              <a:t>课后作业：</a:t>
+            </a:r>
+          </a:p>
+          <a:p>
+            <a:r>
+              <a:rPr lang="zh-CN" dirty="0"/>
+              <a:t>· 完成教材 15.2.4–15.2.6 动手练</a:t>
+            </a:r>
+          </a:p>
+          <a:p>
+            <a:r>
+              <a:rPr lang="zh-CN" dirty="0"/>
+              <a:t/>
+            </a:r>
+          </a:p>
+          <a:p>
+            <a:r>
+              <a:rPr lang="zh-CN" dirty="0"/>
+              <a:t>节奏：讲 20 分钟 → 学员自己敲 40 分钟（不看答案）→ 对讲评自查 20 分钟 → 写作业 10 分钟。</a:t>
+            </a:r>
+          </a:p>
+        </p:txBody>
+      </p:sp>
     </p:spTree>
   </p:cSld>
   <p:clrMapOvr>
@@ -1052,6 +1606,74 @@
           </a:p>
         </p:txBody>
       </p:sp>
+      <p:sp>
+        <p:nvSpPr>
+          <p:cNvPr id="2" name="讲课提示"/>
+          <p:cNvSpPr txBox="1"/>
+          <p:nvPr/>
+        </p:nvSpPr>
+        <p:spPr>
+          <a:xfrm>
+            <a:off x="457200" y="457200"/>
+            <a:ext cx="6858000" cy="4800600"/>
+          </a:xfrm>
+          <a:prstGeom prst="rect">
+            <a:avLst/>
+          </a:prstGeom>
+        </p:spPr>
+        <p:txBody>
+          <a:bodyPr wrap="square"/>
+          <a:lstStyle/>
+          <a:p>
+            <a:r>
+              <a:rPr lang="zh-CN" dirty="0"/>
+              <a:t>第 80 节 · 核心知识点：散点图与自动计算数据</a:t>
+            </a:r>
+          </a:p>
+          <a:p>
+            <a:r>
+              <a:rPr lang="zh-CN" dirty="0"/>
+              <a:t/>
+            </a:r>
+          </a:p>
+          <a:p>
+            <a:r>
+              <a:rPr lang="zh-CN" dirty="0"/>
+              <a:t>讲这一页时：先让学生说出上节课的结论，再逐块讲要点。</a:t>
+            </a:r>
+          </a:p>
+          <a:p>
+            <a:r>
+              <a:rPr lang="zh-CN" dirty="0"/>
+              <a:t>每讲完一块，问一句「这一步如果写错了，报错会长什么样？」——把错误提前讲。</a:t>
+            </a:r>
+          </a:p>
+          <a:p>
+            <a:r>
+              <a:rPr lang="zh-CN" dirty="0"/>
+              <a:t/>
+            </a:r>
+          </a:p>
+          <a:p>
+            <a:r>
+              <a:rPr lang="zh-CN" dirty="0"/>
+              <a:t>本节目标：掌握 scatter 的 s / c 两件套；会生成随机数据</a:t>
+            </a:r>
+          </a:p>
+          <a:p>
+            <a:r>
+              <a:rPr lang="zh-CN" dirty="0"/>
+              <a:t/>
+            </a:r>
+          </a:p>
+          <a:p>
+            <a:r>
+              <a:rPr lang="zh-CN" dirty="0"/>
+              <a:t>看不到懂的地方，回讲义对应小节读一遍，再回来对着这页复述一次——能讲出来才算真懂。</a:t>
+            </a:r>
+          </a:p>
+        </p:txBody>
+      </p:sp>
     </p:spTree>
   </p:cSld>
   <p:clrMapOvr>
@@ -1175,6 +1797,104 @@
           </a:p>
         </p:txBody>
       </p:sp>
+      <p:sp>
+        <p:nvSpPr>
+          <p:cNvPr id="2" name="讲课提示"/>
+          <p:cNvSpPr txBox="1"/>
+          <p:nvPr/>
+        </p:nvSpPr>
+        <p:spPr>
+          <a:xfrm>
+            <a:off x="457200" y="457200"/>
+            <a:ext cx="6858000" cy="4800600"/>
+          </a:xfrm>
+          <a:prstGeom prst="rect">
+            <a:avLst/>
+          </a:prstGeom>
+        </p:spPr>
+        <p:txBody>
+          <a:bodyPr wrap="square"/>
+          <a:lstStyle/>
+          <a:p>
+            <a:r>
+              <a:rPr lang="zh-CN" dirty="0"/>
+              <a:t>第 81 节 · ★ 校正绘图、刻度与颜色映射</a:t>
+            </a:r>
+          </a:p>
+          <a:p>
+            <a:r>
+              <a:rPr lang="zh-CN" dirty="0"/>
+              <a:t>单元 15 · Matplotlib 生成数据 · W18–W19</a:t>
+            </a:r>
+          </a:p>
+          <a:p>
+            <a:r>
+              <a:rPr lang="zh-CN" dirty="0"/>
+              <a:t/>
+            </a:r>
+          </a:p>
+          <a:p>
+            <a:r>
+              <a:rPr lang="zh-CN" dirty="0"/>
+              <a:t>学习目标：会用 `axis()` 留边距（最高频的坑）；会定制刻度、颜色与颜色映射</a:t>
+            </a:r>
+          </a:p>
+          <a:p>
+            <a:r>
+              <a:rPr lang="zh-CN" dirty="0"/>
+              <a:t/>
+            </a:r>
+          </a:p>
+          <a:p>
+            <a:r>
+              <a:rPr lang="zh-CN" dirty="0"/>
+              <a:t>课堂实操（40 分钟，不看答案）：</a:t>
+            </a:r>
+          </a:p>
+          <a:p>
+            <a:r>
+              <a:rPr lang="zh-CN" dirty="0"/>
+              <a:t>· ★ 现场演示不调 axis() 时点被裁掉</a:t>
+            </a:r>
+          </a:p>
+          <a:p>
+            <a:r>
+              <a:rPr lang="zh-CN" dirty="0"/>
+              <a:t>· 用 Blues 渐变画散点图</a:t>
+            </a:r>
+          </a:p>
+          <a:p>
+            <a:r>
+              <a:rPr lang="zh-CN" dirty="0"/>
+              <a:t/>
+            </a:r>
+          </a:p>
+          <a:p>
+            <a:r>
+              <a:rPr lang="zh-CN" dirty="0"/>
+              <a:t>课后作业：</a:t>
+            </a:r>
+          </a:p>
+          <a:p>
+            <a:r>
+              <a:rPr lang="zh-CN" dirty="0"/>
+              <a:t>· 完成教材 15.2.7–15.2.10 动手练</a:t>
+            </a:r>
+          </a:p>
+          <a:p>
+            <a:r>
+              <a:rPr lang="zh-CN" dirty="0"/>
+              <a:t/>
+            </a:r>
+          </a:p>
+          <a:p>
+            <a:r>
+              <a:rPr lang="zh-CN" dirty="0"/>
+              <a:t>节奏：讲 20 分钟 → 学员自己敲 40 分钟（不看答案）→ 对讲评自查 20 分钟 → 写作业 10 分钟。</a:t>
+            </a:r>
+          </a:p>
+        </p:txBody>
+      </p:sp>
     </p:spTree>
   </p:cSld>
   <p:clrMapOvr>
@@ -1268,6 +1988,74 @@
           </a:p>
         </p:txBody>
       </p:sp>
+      <p:sp>
+        <p:nvSpPr>
+          <p:cNvPr id="2" name="讲课提示"/>
+          <p:cNvSpPr txBox="1"/>
+          <p:nvPr/>
+        </p:nvSpPr>
+        <p:spPr>
+          <a:xfrm>
+            <a:off x="457200" y="457200"/>
+            <a:ext cx="6858000" cy="4800600"/>
+          </a:xfrm>
+          <a:prstGeom prst="rect">
+            <a:avLst/>
+          </a:prstGeom>
+        </p:spPr>
+        <p:txBody>
+          <a:bodyPr wrap="square"/>
+          <a:lstStyle/>
+          <a:p>
+            <a:r>
+              <a:rPr lang="zh-CN" dirty="0"/>
+              <a:t>第 81 节 · 核心知识点：★ 校正绘图、刻度与颜色映射</a:t>
+            </a:r>
+          </a:p>
+          <a:p>
+            <a:r>
+              <a:rPr lang="zh-CN" dirty="0"/>
+              <a:t/>
+            </a:r>
+          </a:p>
+          <a:p>
+            <a:r>
+              <a:rPr lang="zh-CN" dirty="0"/>
+              <a:t>讲这一页时：先让学生说出上节课的结论，再逐块讲要点。</a:t>
+            </a:r>
+          </a:p>
+          <a:p>
+            <a:r>
+              <a:rPr lang="zh-CN" dirty="0"/>
+              <a:t>每讲完一块，问一句「这一步如果写错了，报错会长什么样？」——把错误提前讲。</a:t>
+            </a:r>
+          </a:p>
+          <a:p>
+            <a:r>
+              <a:rPr lang="zh-CN" dirty="0"/>
+              <a:t/>
+            </a:r>
+          </a:p>
+          <a:p>
+            <a:r>
+              <a:rPr lang="zh-CN" dirty="0"/>
+              <a:t>本节目标：会用 `axis()` 留边距（最高频的坑）；会定制刻度、颜色与颜色映射</a:t>
+            </a:r>
+          </a:p>
+          <a:p>
+            <a:r>
+              <a:rPr lang="zh-CN" dirty="0"/>
+              <a:t/>
+            </a:r>
+          </a:p>
+          <a:p>
+            <a:r>
+              <a:rPr lang="zh-CN" dirty="0"/>
+              <a:t>看不到懂的地方，回讲义对应小节读一遍，再回来对着这页复述一次——能讲出来才算真懂。</a:t>
+            </a:r>
+          </a:p>
+        </p:txBody>
+      </p:sp>
     </p:spTree>
   </p:cSld>
   <p:clrMapOvr>
@@ -1391,6 +2179,104 @@
           </a:p>
         </p:txBody>
       </p:sp>
+      <p:sp>
+        <p:nvSpPr>
+          <p:cNvPr id="2" name="讲课提示"/>
+          <p:cNvSpPr txBox="1"/>
+          <p:nvPr/>
+        </p:nvSpPr>
+        <p:spPr>
+          <a:xfrm>
+            <a:off x="457200" y="457200"/>
+            <a:ext cx="6858000" cy="4800600"/>
+          </a:xfrm>
+          <a:prstGeom prst="rect">
+            <a:avLst/>
+          </a:prstGeom>
+        </p:spPr>
+        <p:txBody>
+          <a:bodyPr wrap="square"/>
+          <a:lstStyle/>
+          <a:p>
+            <a:r>
+              <a:rPr lang="zh-CN" dirty="0"/>
+              <a:t>第 82 节 · 随机游走 RandomWalk 类</a:t>
+            </a:r>
+          </a:p>
+          <a:p>
+            <a:r>
+              <a:rPr lang="zh-CN" dirty="0"/>
+              <a:t>单元 15 · Matplotlib 生成数据 · W19</a:t>
+            </a:r>
+          </a:p>
+          <a:p>
+            <a:r>
+              <a:rPr lang="zh-CN" dirty="0"/>
+              <a:t/>
+            </a:r>
+          </a:p>
+          <a:p>
+            <a:r>
+              <a:rPr lang="zh-CN" dirty="0"/>
+              <a:t>学习目标：能写 RandomWalk 类并模拟多次游走；理解 fill_walk 拒绝原地不动的逻辑</a:t>
+            </a:r>
+          </a:p>
+          <a:p>
+            <a:r>
+              <a:rPr lang="zh-CN" dirty="0"/>
+              <a:t/>
+            </a:r>
+          </a:p>
+          <a:p>
+            <a:r>
+              <a:rPr lang="zh-CN" dirty="0"/>
+              <a:t>课堂实操（40 分钟，不看答案）：</a:t>
+            </a:r>
+          </a:p>
+          <a:p>
+            <a:r>
+              <a:rPr lang="zh-CN" dirty="0"/>
+              <a:t>· 实现 fill_walk 并画一条路径</a:t>
+            </a:r>
+          </a:p>
+          <a:p>
+            <a:r>
+              <a:rPr lang="zh-CN" dirty="0"/>
+              <a:t>· 模拟 5000 条路径，保存成 PNG</a:t>
+            </a:r>
+          </a:p>
+          <a:p>
+            <a:r>
+              <a:rPr lang="zh-CN" dirty="0"/>
+              <a:t/>
+            </a:r>
+          </a:p>
+          <a:p>
+            <a:r>
+              <a:rPr lang="zh-CN" dirty="0"/>
+              <a:t>课后作业：</a:t>
+            </a:r>
+          </a:p>
+          <a:p>
+            <a:r>
+              <a:rPr lang="zh-CN" dirty="0"/>
+              <a:t>· ★ 产出：随机游走图脚本</a:t>
+            </a:r>
+          </a:p>
+          <a:p>
+            <a:r>
+              <a:rPr lang="zh-CN" dirty="0"/>
+              <a:t/>
+            </a:r>
+          </a:p>
+          <a:p>
+            <a:r>
+              <a:rPr lang="zh-CN" dirty="0"/>
+              <a:t>节奏：讲 20 分钟 → 学员自己敲 40 分钟（不看答案）→ 对讲评自查 20 分钟 → 写作业 10 分钟。</a:t>
+            </a:r>
+          </a:p>
+        </p:txBody>
+      </p:sp>
     </p:spTree>
   </p:cSld>
   <p:clrMapOvr>
@@ -1416,6 +2302,74 @@
           <a:chExt cx="0" cy="0"/>
         </a:xfrm>
       </p:grpSpPr>
+      <p:sp>
+        <p:nvSpPr>
+          <p:cNvPr id="2" name="讲课提示"/>
+          <p:cNvSpPr txBox="1"/>
+          <p:nvPr/>
+        </p:nvSpPr>
+        <p:spPr>
+          <a:xfrm>
+            <a:off x="457200" y="457200"/>
+            <a:ext cx="6858000" cy="4800600"/>
+          </a:xfrm>
+          <a:prstGeom prst="rect">
+            <a:avLst/>
+          </a:prstGeom>
+        </p:spPr>
+        <p:txBody>
+          <a:bodyPr wrap="square"/>
+          <a:lstStyle/>
+          <a:p>
+            <a:r>
+              <a:rPr lang="zh-CN" dirty="0"/>
+              <a:t>第 82 节 · 核心知识点：随机游走 RandomWalk 类</a:t>
+            </a:r>
+          </a:p>
+          <a:p>
+            <a:r>
+              <a:rPr lang="zh-CN" dirty="0"/>
+              <a:t/>
+            </a:r>
+          </a:p>
+          <a:p>
+            <a:r>
+              <a:rPr lang="zh-CN" dirty="0"/>
+              <a:t>讲这一页时：先让学生说出上节课的结论，再逐块讲要点。</a:t>
+            </a:r>
+          </a:p>
+          <a:p>
+            <a:r>
+              <a:rPr lang="zh-CN" dirty="0"/>
+              <a:t>每讲完一块，问一句「这一步如果写错了，报错会长什么样？」——把错误提前讲。</a:t>
+            </a:r>
+          </a:p>
+          <a:p>
+            <a:r>
+              <a:rPr lang="zh-CN" dirty="0"/>
+              <a:t/>
+            </a:r>
+          </a:p>
+          <a:p>
+            <a:r>
+              <a:rPr lang="zh-CN" dirty="0"/>
+              <a:t>本节目标：能写 RandomWalk 类并模拟多次游走；理解 fill_walk 拒绝原地不动的逻辑</a:t>
+            </a:r>
+          </a:p>
+          <a:p>
+            <a:r>
+              <a:rPr lang="zh-CN" dirty="0"/>
+              <a:t/>
+            </a:r>
+          </a:p>
+          <a:p>
+            <a:r>
+              <a:rPr lang="zh-CN" dirty="0"/>
+              <a:t>看不到懂的地方，回讲义对应小节读一遍，再回来对着这页复述一次——能讲出来才算真懂。</a:t>
+            </a:r>
+          </a:p>
+        </p:txBody>
+      </p:sp>
       <p:sp>
         <p:nvSpPr>
           <p:cNvPr id="2" name="讲课提示"/>

--- a/python-course-ppt/逐节课件/Python讲授课件-单元15.pptx
+++ b/python-course-ppt/逐节课件/Python讲授课件-单元15.pptx
@@ -238,2214 +238,6 @@
 </p:notesMaster>
 </file>
 
-<file path=ppt/notesSlides/notesSlide1.xml><?xml version="1.0" encoding="utf-8"?>
-<p:notes xmlns:a="http://schemas.openxmlformats.org/drawingml/2006/main" xmlns:p="http://schemas.openxmlformats.org/presentationml/2006/main" xmlns:r="http://schemas.openxmlformats.org/officeDocument/2006/relationships">
-  <p:cSld>
-    <p:spTree>
-      <p:nvGrpSpPr>
-        <p:cNvPr id="1" name=""/>
-        <p:cNvGrpSpPr/>
-        <p:nvPr/>
-      </p:nvGrpSpPr>
-      <p:grpSpPr>
-        <a:xfrm>
-          <a:off x="0" y="0"/>
-          <a:ext cx="0" cy="0"/>
-          <a:chOff x="0" y="0"/>
-          <a:chExt cx="0" cy="0"/>
-        </a:xfrm>
-      </p:grpSpPr>
-      <p:sp>
-        <p:nvSpPr>
-          <p:cNvPr id="2" name="讲课提示"/>
-          <p:cNvSpPr txBox="1"/>
-          <p:nvPr/>
-        </p:nvSpPr>
-        <p:spPr>
-          <a:xfrm>
-            <a:off x="457200" y="457200"/>
-            <a:ext cx="6858000" cy="4800600"/>
-          </a:xfrm>
-          <a:prstGeom prst="rect">
-            <a:avLst/>
-          </a:prstGeom>
-        </p:spPr>
-        <p:txBody>
-          <a:bodyPr wrap="square"/>
-          <a:lstStyle/>
-          <a:p>
-            <a:r>
-              <a:rPr lang="zh-CN" dirty="0"/>
-              <a:t>单元 15 · 单元 15 · Matplotlib 生成数据</a:t>
-            </a:r>
-          </a:p>
-          <a:p>
-            <a:r>
-              <a:rPr lang="zh-CN" dirty="0"/>
-              <a:t/>
-            </a:r>
-          </a:p>
-          <a:p>
-            <a:r>
-              <a:rPr lang="zh-CN" dirty="0"/>
-              <a:t>本单元包含以下课节：</a:t>
-            </a:r>
-          </a:p>
-          <a:p>
-            <a:r>
-              <a:rPr lang="zh-CN" dirty="0"/>
-              <a:t>· 第 79 节 Matplotlib 入门与折线图</a:t>
-            </a:r>
-          </a:p>
-          <a:p>
-            <a:r>
-              <a:rPr lang="zh-CN" dirty="0"/>
-              <a:t>· 第 80 节 散点图与自动计算数据</a:t>
-            </a:r>
-          </a:p>
-          <a:p>
-            <a:r>
-              <a:rPr lang="zh-CN" dirty="0"/>
-              <a:t>· 第 81 节 ★ 校正绘图、刻度与颜色映射</a:t>
-            </a:r>
-          </a:p>
-          <a:p>
-            <a:r>
-              <a:rPr lang="zh-CN" dirty="0"/>
-              <a:t>· 第 82 节 随机游走 RandomWalk 类</a:t>
-            </a:r>
-          </a:p>
-          <a:p>
-            <a:r>
-              <a:rPr lang="zh-CN" dirty="0"/>
-              <a:t>· 第 83 节 Plotly 掷骰子与动手实战</a:t>
-            </a:r>
-          </a:p>
-          <a:p>
-            <a:r>
-              <a:rPr lang="zh-CN" dirty="0"/>
-              <a:t/>
-            </a:r>
-          </a:p>
-          <a:p>
-            <a:r>
-              <a:rPr lang="zh-CN" dirty="0"/>
-              <a:t>开场用 3 分钟讲清：这个单元学完能做出什么，最后会被关卡怎么验。</a:t>
-            </a:r>
-          </a:p>
-        </p:txBody>
-      </p:sp>
-      <p:sp>
-        <p:nvSpPr>
-          <p:cNvPr id="2" name="讲课提示"/>
-          <p:cNvSpPr txBox="1"/>
-          <p:nvPr/>
-        </p:nvSpPr>
-        <p:spPr>
-          <a:xfrm>
-            <a:off x="457200" y="457200"/>
-            <a:ext cx="6858000" cy="4800600"/>
-          </a:xfrm>
-          <a:prstGeom prst="rect">
-            <a:avLst/>
-          </a:prstGeom>
-        </p:spPr>
-        <p:txBody>
-          <a:bodyPr wrap="square"/>
-          <a:lstStyle/>
-          <a:p>
-            <a:r>
-              <a:rPr lang="zh-CN" dirty="0"/>
-              <a:t>单元 15 · 单元 15 · Matplotlib 生成数据</a:t>
-            </a:r>
-          </a:p>
-          <a:p>
-            <a:r>
-              <a:rPr lang="zh-CN" dirty="0"/>
-              <a:t/>
-            </a:r>
-          </a:p>
-          <a:p>
-            <a:r>
-              <a:rPr lang="zh-CN" dirty="0"/>
-              <a:t>本单元包含以下课节：</a:t>
-            </a:r>
-          </a:p>
-          <a:p>
-            <a:r>
-              <a:rPr lang="zh-CN" dirty="0"/>
-              <a:t>· 第 79 节 Matplotlib 入门与折线图</a:t>
-            </a:r>
-          </a:p>
-          <a:p>
-            <a:r>
-              <a:rPr lang="zh-CN" dirty="0"/>
-              <a:t>· 第 80 节 散点图与自动计算数据</a:t>
-            </a:r>
-          </a:p>
-          <a:p>
-            <a:r>
-              <a:rPr lang="zh-CN" dirty="0"/>
-              <a:t>· 第 81 节 ★ 校正绘图、刻度与颜色映射</a:t>
-            </a:r>
-          </a:p>
-          <a:p>
-            <a:r>
-              <a:rPr lang="zh-CN" dirty="0"/>
-              <a:t>· 第 82 节 随机游走 RandomWalk 类</a:t>
-            </a:r>
-          </a:p>
-          <a:p>
-            <a:r>
-              <a:rPr lang="zh-CN" dirty="0"/>
-              <a:t>· 第 83 节 Plotly 掷骰子与动手实战</a:t>
-            </a:r>
-          </a:p>
-          <a:p>
-            <a:r>
-              <a:rPr lang="zh-CN" dirty="0"/>
-              <a:t/>
-            </a:r>
-          </a:p>
-          <a:p>
-            <a:r>
-              <a:rPr lang="zh-CN" dirty="0"/>
-              <a:t>开场用 3 分钟讲清：这个单元学完能做出什么，最后会被关卡怎么验。</a:t>
-            </a:r>
-          </a:p>
-        </p:txBody>
-      </p:sp>
-    </p:spTree>
-  </p:cSld>
-  <p:clrMapOvr>
-    <a:masterClrMapping/>
-  </p:clrMapOvr>
-</p:notes>
-</file>
-
-<file path=ppt/notesSlides/notesSlide10.xml><?xml version="1.0" encoding="utf-8"?>
-<p:notes xmlns:a="http://schemas.openxmlformats.org/drawingml/2006/main" xmlns:p="http://schemas.openxmlformats.org/presentationml/2006/main" xmlns:r="http://schemas.openxmlformats.org/officeDocument/2006/relationships">
-  <p:cSld>
-    <p:spTree>
-      <p:nvGrpSpPr>
-        <p:cNvPr id="1" name=""/>
-        <p:cNvGrpSpPr/>
-        <p:nvPr/>
-      </p:nvGrpSpPr>
-      <p:grpSpPr>
-        <a:xfrm>
-          <a:off x="0" y="0"/>
-          <a:ext cx="0" cy="0"/>
-          <a:chOff x="0" y="0"/>
-          <a:chExt cx="0" cy="0"/>
-        </a:xfrm>
-      </p:grpSpPr>
-      <p:sp>
-        <p:nvSpPr>
-          <p:cNvPr id="2" name="讲课提示"/>
-          <p:cNvSpPr txBox="1"/>
-          <p:nvPr/>
-        </p:nvSpPr>
-        <p:spPr>
-          <a:xfrm>
-            <a:off x="457200" y="457200"/>
-            <a:ext cx="6858000" cy="4800600"/>
-          </a:xfrm>
-          <a:prstGeom prst="rect">
-            <a:avLst/>
-          </a:prstGeom>
-        </p:spPr>
-        <p:txBody>
-          <a:bodyPr wrap="square"/>
-          <a:lstStyle/>
-          <a:p>
-            <a:r>
-              <a:rPr lang="zh-CN" dirty="0"/>
-              <a:t>第 83 节 · Plotly 掷骰子与动手实战</a:t>
-            </a:r>
-          </a:p>
-          <a:p>
-            <a:r>
-              <a:rPr lang="zh-CN" dirty="0"/>
-              <a:t>单元 15 · Matplotlib 生成数据 · W19</a:t>
-            </a:r>
-          </a:p>
-          <a:p>
-            <a:r>
-              <a:rPr lang="zh-CN" dirty="0"/>
-              <a:t/>
-            </a:r>
-          </a:p>
-          <a:p>
-            <a:r>
-              <a:rPr lang="zh-CN" dirty="0"/>
-              <a:t>学习目标：会用 Plotly 的 Die 类与 px.bar 画直方图；能比较两个骰子的分布</a:t>
-            </a:r>
-          </a:p>
-          <a:p>
-            <a:r>
-              <a:rPr lang="zh-CN" dirty="0"/>
-              <a:t/>
-            </a:r>
-          </a:p>
-          <a:p>
-            <a:r>
-              <a:rPr lang="zh-CN" dirty="0"/>
-              <a:t>课堂实操（40 分钟，不看答案）：</a:t>
-            </a:r>
-          </a:p>
-          <a:p>
-            <a:r>
-              <a:rPr lang="zh-CN" dirty="0"/>
-              <a:t>· 实现 Die 类并掷 1000 次</a:t>
-            </a:r>
-          </a:p>
-          <a:p>
-            <a:r>
-              <a:rPr lang="zh-CN" dirty="0"/>
-              <a:t>· 同时掷两个面数不同的骰子，对比分布</a:t>
-            </a:r>
-          </a:p>
-          <a:p>
-            <a:r>
-              <a:rPr lang="zh-CN" dirty="0"/>
-              <a:t/>
-            </a:r>
-          </a:p>
-          <a:p>
-            <a:r>
-              <a:rPr lang="zh-CN" dirty="0"/>
-              <a:t>课后作业：</a:t>
-            </a:r>
-          </a:p>
-          <a:p>
-            <a:r>
-              <a:rPr lang="zh-CN" dirty="0"/>
-              <a:t>· ★ 产出：掷骰子分布图（可交互 HTML）</a:t>
-            </a:r>
-          </a:p>
-          <a:p>
-            <a:r>
-              <a:rPr lang="zh-CN" dirty="0"/>
-              <a:t/>
-            </a:r>
-          </a:p>
-          <a:p>
-            <a:r>
-              <a:rPr lang="zh-CN" dirty="0"/>
-              <a:t>节奏：讲 20 分钟 → 学员自己敲 40 分钟（不看答案）→ 对讲评自查 20 分钟 → 写作业 10 分钟。</a:t>
-            </a:r>
-          </a:p>
-        </p:txBody>
-      </p:sp>
-      <p:sp>
-        <p:nvSpPr>
-          <p:cNvPr id="2" name="讲课提示"/>
-          <p:cNvSpPr txBox="1"/>
-          <p:nvPr/>
-        </p:nvSpPr>
-        <p:spPr>
-          <a:xfrm>
-            <a:off x="457200" y="457200"/>
-            <a:ext cx="6858000" cy="4800600"/>
-          </a:xfrm>
-          <a:prstGeom prst="rect">
-            <a:avLst/>
-          </a:prstGeom>
-        </p:spPr>
-        <p:txBody>
-          <a:bodyPr wrap="square"/>
-          <a:lstStyle/>
-          <a:p>
-            <a:r>
-              <a:rPr lang="zh-CN" dirty="0"/>
-              <a:t>第 83 节 · Plotly 掷骰子与动手实战</a:t>
-            </a:r>
-          </a:p>
-          <a:p>
-            <a:r>
-              <a:rPr lang="zh-CN" dirty="0"/>
-              <a:t>单元 15 · Matplotlib 生成数据 · W19</a:t>
-            </a:r>
-          </a:p>
-          <a:p>
-            <a:r>
-              <a:rPr lang="zh-CN" dirty="0"/>
-              <a:t/>
-            </a:r>
-          </a:p>
-          <a:p>
-            <a:r>
-              <a:rPr lang="zh-CN" dirty="0"/>
-              <a:t>学习目标：会用 Plotly 的 Die 类与 px.bar 画直方图；能比较两个骰子的分布</a:t>
-            </a:r>
-          </a:p>
-          <a:p>
-            <a:r>
-              <a:rPr lang="zh-CN" dirty="0"/>
-              <a:t/>
-            </a:r>
-          </a:p>
-          <a:p>
-            <a:r>
-              <a:rPr lang="zh-CN" dirty="0"/>
-              <a:t>课堂实操（40 分钟，不看答案）：</a:t>
-            </a:r>
-          </a:p>
-          <a:p>
-            <a:r>
-              <a:rPr lang="zh-CN" dirty="0"/>
-              <a:t>· 实现 Die 类并掷 1000 次</a:t>
-            </a:r>
-          </a:p>
-          <a:p>
-            <a:r>
-              <a:rPr lang="zh-CN" dirty="0"/>
-              <a:t>· 同时掷两个面数不同的骰子，对比分布</a:t>
-            </a:r>
-          </a:p>
-          <a:p>
-            <a:r>
-              <a:rPr lang="zh-CN" dirty="0"/>
-              <a:t/>
-            </a:r>
-          </a:p>
-          <a:p>
-            <a:r>
-              <a:rPr lang="zh-CN" dirty="0"/>
-              <a:t>课后作业：</a:t>
-            </a:r>
-          </a:p>
-          <a:p>
-            <a:r>
-              <a:rPr lang="zh-CN" dirty="0"/>
-              <a:t>· ★ 产出：掷骰子分布图（可交互 HTML）</a:t>
-            </a:r>
-          </a:p>
-          <a:p>
-            <a:r>
-              <a:rPr lang="zh-CN" dirty="0"/>
-              <a:t/>
-            </a:r>
-          </a:p>
-          <a:p>
-            <a:r>
-              <a:rPr lang="zh-CN" dirty="0"/>
-              <a:t>节奏：讲 20 分钟 → 学员自己敲 40 分钟（不看答案）→ 对讲评自查 20 分钟 → 写作业 10 分钟。</a:t>
-            </a:r>
-          </a:p>
-        </p:txBody>
-      </p:sp>
-    </p:spTree>
-  </p:cSld>
-  <p:clrMapOvr>
-    <a:masterClrMapping/>
-  </p:clrMapOvr>
-</p:notes>
-</file>
-
-<file path=ppt/notesSlides/notesSlide11.xml><?xml version="1.0" encoding="utf-8"?>
-<p:notes xmlns:a="http://schemas.openxmlformats.org/drawingml/2006/main" xmlns:p="http://schemas.openxmlformats.org/presentationml/2006/main" xmlns:r="http://schemas.openxmlformats.org/officeDocument/2006/relationships">
-  <p:cSld>
-    <p:spTree>
-      <p:nvGrpSpPr>
-        <p:cNvPr id="1" name=""/>
-        <p:cNvGrpSpPr/>
-        <p:nvPr/>
-      </p:nvGrpSpPr>
-      <p:grpSpPr>
-        <a:xfrm>
-          <a:off x="0" y="0"/>
-          <a:ext cx="0" cy="0"/>
-          <a:chOff x="0" y="0"/>
-          <a:chExt cx="0" cy="0"/>
-        </a:xfrm>
-      </p:grpSpPr>
-      <p:sp>
-        <p:nvSpPr>
-          <p:cNvPr id="2" name="讲课提示"/>
-          <p:cNvSpPr txBox="1"/>
-          <p:nvPr/>
-        </p:nvSpPr>
-        <p:spPr>
-          <a:xfrm>
-            <a:off x="457200" y="457200"/>
-            <a:ext cx="6858000" cy="4800600"/>
-          </a:xfrm>
-          <a:prstGeom prst="rect">
-            <a:avLst/>
-          </a:prstGeom>
-        </p:spPr>
-        <p:txBody>
-          <a:bodyPr wrap="square"/>
-          <a:lstStyle/>
-          <a:p>
-            <a:r>
-              <a:rPr lang="zh-CN" dirty="0"/>
-              <a:t>第 83 节 · 核心知识点：Plotly 掷骰子与动手实战</a:t>
-            </a:r>
-          </a:p>
-          <a:p>
-            <a:r>
-              <a:rPr lang="zh-CN" dirty="0"/>
-              <a:t/>
-            </a:r>
-          </a:p>
-          <a:p>
-            <a:r>
-              <a:rPr lang="zh-CN" dirty="0"/>
-              <a:t>讲这一页时：先让学生说出上节课的结论，再逐块讲要点。</a:t>
-            </a:r>
-          </a:p>
-          <a:p>
-            <a:r>
-              <a:rPr lang="zh-CN" dirty="0"/>
-              <a:t>每讲完一块，问一句「这一步如果写错了，报错会长什么样？」——把错误提前讲。</a:t>
-            </a:r>
-          </a:p>
-          <a:p>
-            <a:r>
-              <a:rPr lang="zh-CN" dirty="0"/>
-              <a:t/>
-            </a:r>
-          </a:p>
-          <a:p>
-            <a:r>
-              <a:rPr lang="zh-CN" dirty="0"/>
-              <a:t>本节目标：会用 Plotly 的 Die 类与 px.bar 画直方图；能比较两个骰子的分布</a:t>
-            </a:r>
-          </a:p>
-          <a:p>
-            <a:r>
-              <a:rPr lang="zh-CN" dirty="0"/>
-              <a:t/>
-            </a:r>
-          </a:p>
-          <a:p>
-            <a:r>
-              <a:rPr lang="zh-CN" dirty="0"/>
-              <a:t>看不到懂的地方，回讲义对应小节读一遍，再回来对着这页复述一次——能讲出来才算真懂。</a:t>
-            </a:r>
-          </a:p>
-        </p:txBody>
-      </p:sp>
-      <p:sp>
-        <p:nvSpPr>
-          <p:cNvPr id="2" name="讲课提示"/>
-          <p:cNvSpPr txBox="1"/>
-          <p:nvPr/>
-        </p:nvSpPr>
-        <p:spPr>
-          <a:xfrm>
-            <a:off x="457200" y="457200"/>
-            <a:ext cx="6858000" cy="4800600"/>
-          </a:xfrm>
-          <a:prstGeom prst="rect">
-            <a:avLst/>
-          </a:prstGeom>
-        </p:spPr>
-        <p:txBody>
-          <a:bodyPr wrap="square"/>
-          <a:lstStyle/>
-          <a:p>
-            <a:r>
-              <a:rPr lang="zh-CN" dirty="0"/>
-              <a:t>第 83 节 · 核心知识点：Plotly 掷骰子与动手实战</a:t>
-            </a:r>
-          </a:p>
-          <a:p>
-            <a:r>
-              <a:rPr lang="zh-CN" dirty="0"/>
-              <a:t/>
-            </a:r>
-          </a:p>
-          <a:p>
-            <a:r>
-              <a:rPr lang="zh-CN" dirty="0"/>
-              <a:t>讲这一页时：先让学生说出上节课的结论，再逐块讲要点。</a:t>
-            </a:r>
-          </a:p>
-          <a:p>
-            <a:r>
-              <a:rPr lang="zh-CN" dirty="0"/>
-              <a:t>每讲完一块，问一句「这一步如果写错了，报错会长什么样？」——把错误提前讲。</a:t>
-            </a:r>
-          </a:p>
-          <a:p>
-            <a:r>
-              <a:rPr lang="zh-CN" dirty="0"/>
-              <a:t/>
-            </a:r>
-          </a:p>
-          <a:p>
-            <a:r>
-              <a:rPr lang="zh-CN" dirty="0"/>
-              <a:t>本节目标：会用 Plotly 的 Die 类与 px.bar 画直方图；能比较两个骰子的分布</a:t>
-            </a:r>
-          </a:p>
-          <a:p>
-            <a:r>
-              <a:rPr lang="zh-CN" dirty="0"/>
-              <a:t/>
-            </a:r>
-          </a:p>
-          <a:p>
-            <a:r>
-              <a:rPr lang="zh-CN" dirty="0"/>
-              <a:t>看不到懂的地方，回讲义对应小节读一遍，再回来对着这页复述一次——能讲出来才算真懂。</a:t>
-            </a:r>
-          </a:p>
-        </p:txBody>
-      </p:sp>
-    </p:spTree>
-  </p:cSld>
-  <p:clrMapOvr>
-    <a:masterClrMapping/>
-  </p:clrMapOvr>
-</p:notes>
-</file>
-
-<file path=ppt/notesSlides/notesSlide12.xml><?xml version="1.0" encoding="utf-8"?>
-<p:notes xmlns:a="http://schemas.openxmlformats.org/drawingml/2006/main" xmlns:p="http://schemas.openxmlformats.org/presentationml/2006/main" xmlns:r="http://schemas.openxmlformats.org/officeDocument/2006/relationships">
-  <p:cSld>
-    <p:spTree>
-      <p:nvGrpSpPr>
-        <p:cNvPr id="1" name=""/>
-        <p:cNvGrpSpPr/>
-        <p:nvPr/>
-      </p:nvGrpSpPr>
-      <p:grpSpPr>
-        <a:xfrm>
-          <a:off x="0" y="0"/>
-          <a:ext cx="0" cy="0"/>
-          <a:chOff x="0" y="0"/>
-          <a:chExt cx="0" cy="0"/>
-        </a:xfrm>
-      </p:grpSpPr>
-      <p:sp>
-        <p:nvSpPr>
-          <p:cNvPr id="2" name="讲课提示"/>
-          <p:cNvSpPr txBox="1"/>
-          <p:nvPr/>
-        </p:nvSpPr>
-        <p:spPr>
-          <a:xfrm>
-            <a:off x="457200" y="457200"/>
-            <a:ext cx="6858000" cy="4800600"/>
-          </a:xfrm>
-          <a:prstGeom prst="rect">
-            <a:avLst/>
-          </a:prstGeom>
-        </p:spPr>
-        <p:txBody>
-          <a:bodyPr wrap="square"/>
-          <a:lstStyle/>
-          <a:p>
-            <a:r>
-              <a:rPr lang="zh-CN" dirty="0"/>
-              <a:t>单元 15 小结 · 单元 15 · 小结</a:t>
-            </a:r>
-          </a:p>
-          <a:p>
-            <a:r>
-              <a:rPr lang="zh-CN" dirty="0"/>
-              <a:t/>
-            </a:r>
-          </a:p>
-          <a:p>
-            <a:r>
-              <a:rPr lang="zh-CN" dirty="0"/>
-              <a:t>收尾动作：让学生合上讲义，口述本单元三个最重要的结论；说不出来的，回对应课节。</a:t>
-            </a:r>
-          </a:p>
-          <a:p>
-            <a:r>
-              <a:rPr lang="zh-CN" dirty="0"/>
-              <a:t>然后当场勾一遍本单元课节的「已完成」，没打勾的进下一单元前补掉。</a:t>
-            </a:r>
-          </a:p>
-        </p:txBody>
-      </p:sp>
-      <p:sp>
-        <p:nvSpPr>
-          <p:cNvPr id="2" name="讲课提示"/>
-          <p:cNvSpPr txBox="1"/>
-          <p:nvPr/>
-        </p:nvSpPr>
-        <p:spPr>
-          <a:xfrm>
-            <a:off x="457200" y="457200"/>
-            <a:ext cx="6858000" cy="4800600"/>
-          </a:xfrm>
-          <a:prstGeom prst="rect">
-            <a:avLst/>
-          </a:prstGeom>
-        </p:spPr>
-        <p:txBody>
-          <a:bodyPr wrap="square"/>
-          <a:lstStyle/>
-          <a:p>
-            <a:r>
-              <a:rPr lang="zh-CN" dirty="0"/>
-              <a:t>单元 15 小结 · 单元 15 · 小结</a:t>
-            </a:r>
-          </a:p>
-          <a:p>
-            <a:r>
-              <a:rPr lang="zh-CN" dirty="0"/>
-              <a:t/>
-            </a:r>
-          </a:p>
-          <a:p>
-            <a:r>
-              <a:rPr lang="zh-CN" dirty="0"/>
-              <a:t>收尾动作：让学生合上讲义，口述本单元三个最重要的结论；说不出来的，回对应课节。</a:t>
-            </a:r>
-          </a:p>
-          <a:p>
-            <a:r>
-              <a:rPr lang="zh-CN" dirty="0"/>
-              <a:t>然后当场勾一遍本单元课节的「已完成」，没打勾的进下一单元前补掉。</a:t>
-            </a:r>
-          </a:p>
-        </p:txBody>
-      </p:sp>
-    </p:spTree>
-  </p:cSld>
-  <p:clrMapOvr>
-    <a:masterClrMapping/>
-  </p:clrMapOvr>
-</p:notes>
-</file>
-
-<file path=ppt/notesSlides/notesSlide2.xml><?xml version="1.0" encoding="utf-8"?>
-<p:notes xmlns:a="http://schemas.openxmlformats.org/drawingml/2006/main" xmlns:p="http://schemas.openxmlformats.org/presentationml/2006/main" xmlns:r="http://schemas.openxmlformats.org/officeDocument/2006/relationships">
-  <p:cSld>
-    <p:spTree>
-      <p:nvGrpSpPr>
-        <p:cNvPr id="1" name=""/>
-        <p:cNvGrpSpPr/>
-        <p:nvPr/>
-      </p:nvGrpSpPr>
-      <p:grpSpPr>
-        <a:xfrm>
-          <a:off x="0" y="0"/>
-          <a:ext cx="0" cy="0"/>
-          <a:chOff x="0" y="0"/>
-          <a:chExt cx="0" cy="0"/>
-        </a:xfrm>
-      </p:grpSpPr>
-      <p:sp>
-        <p:nvSpPr>
-          <p:cNvPr id="2" name="讲课提示"/>
-          <p:cNvSpPr txBox="1"/>
-          <p:nvPr/>
-        </p:nvSpPr>
-        <p:spPr>
-          <a:xfrm>
-            <a:off x="457200" y="457200"/>
-            <a:ext cx="6858000" cy="4800600"/>
-          </a:xfrm>
-          <a:prstGeom prst="rect">
-            <a:avLst/>
-          </a:prstGeom>
-        </p:spPr>
-        <p:txBody>
-          <a:bodyPr wrap="square"/>
-          <a:lstStyle/>
-          <a:p>
-            <a:r>
-              <a:rPr lang="zh-CN" dirty="0"/>
-              <a:t>第 79 节 · Matplotlib 入门与折线图</a:t>
-            </a:r>
-          </a:p>
-          <a:p>
-            <a:r>
-              <a:rPr lang="zh-CN" dirty="0"/>
-              <a:t>单元 15 · Matplotlib 生成数据 · W18</a:t>
-            </a:r>
-          </a:p>
-          <a:p>
-            <a:r>
-              <a:rPr lang="zh-CN" dirty="0"/>
-              <a:t/>
-            </a:r>
-          </a:p>
-          <a:p>
-            <a:r>
-              <a:rPr lang="zh-CN" dirty="0"/>
-              <a:t>学习目标：会用 `fig, ax = plt.subplots()` 画折线图；知道为什么该用面向对象写法</a:t>
-            </a:r>
-          </a:p>
-          <a:p>
-            <a:r>
-              <a:rPr lang="zh-CN" dirty="0"/>
-              <a:t/>
-            </a:r>
-          </a:p>
-          <a:p>
-            <a:r>
-              <a:rPr lang="zh-CN" dirty="0"/>
-              <a:t>课堂实操（40 分钟，不看答案）：</a:t>
-            </a:r>
-          </a:p>
-          <a:p>
-            <a:r>
-              <a:rPr lang="zh-CN" dirty="0"/>
-              <a:t>· 画出第一条折线图并加标签</a:t>
-            </a:r>
-          </a:p>
-          <a:p>
-            <a:r>
-              <a:rPr lang="zh-CN" dirty="0"/>
-              <a:t>· 把 plt.plot() 写法改成 fig, ax 写法对比</a:t>
-            </a:r>
-          </a:p>
-          <a:p>
-            <a:r>
-              <a:rPr lang="zh-CN" dirty="0"/>
-              <a:t/>
-            </a:r>
-          </a:p>
-          <a:p>
-            <a:r>
-              <a:rPr lang="zh-CN" dirty="0"/>
-              <a:t>课后作业：</a:t>
-            </a:r>
-          </a:p>
-          <a:p>
-            <a:r>
-              <a:rPr lang="zh-CN" dirty="0"/>
-              <a:t>· 装好 matplotlib 并画出第一张图</a:t>
-            </a:r>
-          </a:p>
-          <a:p>
-            <a:r>
-              <a:rPr lang="zh-CN" dirty="0"/>
-              <a:t/>
-            </a:r>
-          </a:p>
-          <a:p>
-            <a:r>
-              <a:rPr lang="zh-CN" dirty="0"/>
-              <a:t>节奏：讲 20 分钟 → 学员自己敲 40 分钟（不看答案）→ 对讲评自查 20 分钟 → 写作业 10 分钟。</a:t>
-            </a:r>
-          </a:p>
-        </p:txBody>
-      </p:sp>
-      <p:sp>
-        <p:nvSpPr>
-          <p:cNvPr id="2" name="讲课提示"/>
-          <p:cNvSpPr txBox="1"/>
-          <p:nvPr/>
-        </p:nvSpPr>
-        <p:spPr>
-          <a:xfrm>
-            <a:off x="457200" y="457200"/>
-            <a:ext cx="6858000" cy="4800600"/>
-          </a:xfrm>
-          <a:prstGeom prst="rect">
-            <a:avLst/>
-          </a:prstGeom>
-        </p:spPr>
-        <p:txBody>
-          <a:bodyPr wrap="square"/>
-          <a:lstStyle/>
-          <a:p>
-            <a:r>
-              <a:rPr lang="zh-CN" dirty="0"/>
-              <a:t>第 79 节 · Matplotlib 入门与折线图</a:t>
-            </a:r>
-          </a:p>
-          <a:p>
-            <a:r>
-              <a:rPr lang="zh-CN" dirty="0"/>
-              <a:t>单元 15 · Matplotlib 生成数据 · W18</a:t>
-            </a:r>
-          </a:p>
-          <a:p>
-            <a:r>
-              <a:rPr lang="zh-CN" dirty="0"/>
-              <a:t/>
-            </a:r>
-          </a:p>
-          <a:p>
-            <a:r>
-              <a:rPr lang="zh-CN" dirty="0"/>
-              <a:t>学习目标：会用 `fig, ax = plt.subplots()` 画折线图；知道为什么该用面向对象写法</a:t>
-            </a:r>
-          </a:p>
-          <a:p>
-            <a:r>
-              <a:rPr lang="zh-CN" dirty="0"/>
-              <a:t/>
-            </a:r>
-          </a:p>
-          <a:p>
-            <a:r>
-              <a:rPr lang="zh-CN" dirty="0"/>
-              <a:t>课堂实操（40 分钟，不看答案）：</a:t>
-            </a:r>
-          </a:p>
-          <a:p>
-            <a:r>
-              <a:rPr lang="zh-CN" dirty="0"/>
-              <a:t>· 画出第一条折线图并加标签</a:t>
-            </a:r>
-          </a:p>
-          <a:p>
-            <a:r>
-              <a:rPr lang="zh-CN" dirty="0"/>
-              <a:t>· 把 plt.plot() 写法改成 fig, ax 写法对比</a:t>
-            </a:r>
-          </a:p>
-          <a:p>
-            <a:r>
-              <a:rPr lang="zh-CN" dirty="0"/>
-              <a:t/>
-            </a:r>
-          </a:p>
-          <a:p>
-            <a:r>
-              <a:rPr lang="zh-CN" dirty="0"/>
-              <a:t>课后作业：</a:t>
-            </a:r>
-          </a:p>
-          <a:p>
-            <a:r>
-              <a:rPr lang="zh-CN" dirty="0"/>
-              <a:t>· 装好 matplotlib 并画出第一张图</a:t>
-            </a:r>
-          </a:p>
-          <a:p>
-            <a:r>
-              <a:rPr lang="zh-CN" dirty="0"/>
-              <a:t/>
-            </a:r>
-          </a:p>
-          <a:p>
-            <a:r>
-              <a:rPr lang="zh-CN" dirty="0"/>
-              <a:t>节奏：讲 20 分钟 → 学员自己敲 40 分钟（不看答案）→ 对讲评自查 20 分钟 → 写作业 10 分钟。</a:t>
-            </a:r>
-          </a:p>
-        </p:txBody>
-      </p:sp>
-    </p:spTree>
-  </p:cSld>
-  <p:clrMapOvr>
-    <a:masterClrMapping/>
-  </p:clrMapOvr>
-</p:notes>
-</file>
-
-<file path=ppt/notesSlides/notesSlide3.xml><?xml version="1.0" encoding="utf-8"?>
-<p:notes xmlns:a="http://schemas.openxmlformats.org/drawingml/2006/main" xmlns:p="http://schemas.openxmlformats.org/presentationml/2006/main" xmlns:r="http://schemas.openxmlformats.org/officeDocument/2006/relationships">
-  <p:cSld>
-    <p:spTree>
-      <p:nvGrpSpPr>
-        <p:cNvPr id="1" name=""/>
-        <p:cNvGrpSpPr/>
-        <p:nvPr/>
-      </p:nvGrpSpPr>
-      <p:grpSpPr>
-        <a:xfrm>
-          <a:off x="0" y="0"/>
-          <a:ext cx="0" cy="0"/>
-          <a:chOff x="0" y="0"/>
-          <a:chExt cx="0" cy="0"/>
-        </a:xfrm>
-      </p:grpSpPr>
-      <p:sp>
-        <p:nvSpPr>
-          <p:cNvPr id="2" name="讲课提示"/>
-          <p:cNvSpPr txBox="1"/>
-          <p:nvPr/>
-        </p:nvSpPr>
-        <p:spPr>
-          <a:xfrm>
-            <a:off x="457200" y="457200"/>
-            <a:ext cx="6858000" cy="4800600"/>
-          </a:xfrm>
-          <a:prstGeom prst="rect">
-            <a:avLst/>
-          </a:prstGeom>
-        </p:spPr>
-        <p:txBody>
-          <a:bodyPr wrap="square"/>
-          <a:lstStyle/>
-          <a:p>
-            <a:r>
-              <a:rPr lang="zh-CN" dirty="0"/>
-              <a:t>第 79 节 · 核心知识点：Matplotlib 入门与折线图</a:t>
-            </a:r>
-          </a:p>
-          <a:p>
-            <a:r>
-              <a:rPr lang="zh-CN" dirty="0"/>
-              <a:t/>
-            </a:r>
-          </a:p>
-          <a:p>
-            <a:r>
-              <a:rPr lang="zh-CN" dirty="0"/>
-              <a:t>讲这一页时：先让学生说出上节课的结论，再逐块讲要点。</a:t>
-            </a:r>
-          </a:p>
-          <a:p>
-            <a:r>
-              <a:rPr lang="zh-CN" dirty="0"/>
-              <a:t>每讲完一块，问一句「这一步如果写错了，报错会长什么样？」——把错误提前讲。</a:t>
-            </a:r>
-          </a:p>
-          <a:p>
-            <a:r>
-              <a:rPr lang="zh-CN" dirty="0"/>
-              <a:t/>
-            </a:r>
-          </a:p>
-          <a:p>
-            <a:r>
-              <a:rPr lang="zh-CN" dirty="0"/>
-              <a:t>本节目标：会用 `fig, ax = plt.subplots()` 画折线图；知道为什么该用面向对象写法</a:t>
-            </a:r>
-          </a:p>
-          <a:p>
-            <a:r>
-              <a:rPr lang="zh-CN" dirty="0"/>
-              <a:t/>
-            </a:r>
-          </a:p>
-          <a:p>
-            <a:r>
-              <a:rPr lang="zh-CN" dirty="0"/>
-              <a:t>看不到懂的地方，回讲义对应小节读一遍，再回来对着这页复述一次——能讲出来才算真懂。</a:t>
-            </a:r>
-          </a:p>
-        </p:txBody>
-      </p:sp>
-      <p:sp>
-        <p:nvSpPr>
-          <p:cNvPr id="2" name="讲课提示"/>
-          <p:cNvSpPr txBox="1"/>
-          <p:nvPr/>
-        </p:nvSpPr>
-        <p:spPr>
-          <a:xfrm>
-            <a:off x="457200" y="457200"/>
-            <a:ext cx="6858000" cy="4800600"/>
-          </a:xfrm>
-          <a:prstGeom prst="rect">
-            <a:avLst/>
-          </a:prstGeom>
-        </p:spPr>
-        <p:txBody>
-          <a:bodyPr wrap="square"/>
-          <a:lstStyle/>
-          <a:p>
-            <a:r>
-              <a:rPr lang="zh-CN" dirty="0"/>
-              <a:t>第 79 节 · 核心知识点：Matplotlib 入门与折线图</a:t>
-            </a:r>
-          </a:p>
-          <a:p>
-            <a:r>
-              <a:rPr lang="zh-CN" dirty="0"/>
-              <a:t/>
-            </a:r>
-          </a:p>
-          <a:p>
-            <a:r>
-              <a:rPr lang="zh-CN" dirty="0"/>
-              <a:t>讲这一页时：先让学生说出上节课的结论，再逐块讲要点。</a:t>
-            </a:r>
-          </a:p>
-          <a:p>
-            <a:r>
-              <a:rPr lang="zh-CN" dirty="0"/>
-              <a:t>每讲完一块，问一句「这一步如果写错了，报错会长什么样？」——把错误提前讲。</a:t>
-            </a:r>
-          </a:p>
-          <a:p>
-            <a:r>
-              <a:rPr lang="zh-CN" dirty="0"/>
-              <a:t/>
-            </a:r>
-          </a:p>
-          <a:p>
-            <a:r>
-              <a:rPr lang="zh-CN" dirty="0"/>
-              <a:t>本节目标：会用 `fig, ax = plt.subplots()` 画折线图；知道为什么该用面向对象写法</a:t>
-            </a:r>
-          </a:p>
-          <a:p>
-            <a:r>
-              <a:rPr lang="zh-CN" dirty="0"/>
-              <a:t/>
-            </a:r>
-          </a:p>
-          <a:p>
-            <a:r>
-              <a:rPr lang="zh-CN" dirty="0"/>
-              <a:t>看不到懂的地方，回讲义对应小节读一遍，再回来对着这页复述一次——能讲出来才算真懂。</a:t>
-            </a:r>
-          </a:p>
-        </p:txBody>
-      </p:sp>
-    </p:spTree>
-  </p:cSld>
-  <p:clrMapOvr>
-    <a:masterClrMapping/>
-  </p:clrMapOvr>
-</p:notes>
-</file>
-
-<file path=ppt/notesSlides/notesSlide4.xml><?xml version="1.0" encoding="utf-8"?>
-<p:notes xmlns:a="http://schemas.openxmlformats.org/drawingml/2006/main" xmlns:p="http://schemas.openxmlformats.org/presentationml/2006/main" xmlns:r="http://schemas.openxmlformats.org/officeDocument/2006/relationships">
-  <p:cSld>
-    <p:spTree>
-      <p:nvGrpSpPr>
-        <p:cNvPr id="1" name=""/>
-        <p:cNvGrpSpPr/>
-        <p:nvPr/>
-      </p:nvGrpSpPr>
-      <p:grpSpPr>
-        <a:xfrm>
-          <a:off x="0" y="0"/>
-          <a:ext cx="0" cy="0"/>
-          <a:chOff x="0" y="0"/>
-          <a:chExt cx="0" cy="0"/>
-        </a:xfrm>
-      </p:grpSpPr>
-      <p:sp>
-        <p:nvSpPr>
-          <p:cNvPr id="2" name="讲课提示"/>
-          <p:cNvSpPr txBox="1"/>
-          <p:nvPr/>
-        </p:nvSpPr>
-        <p:spPr>
-          <a:xfrm>
-            <a:off x="457200" y="457200"/>
-            <a:ext cx="6858000" cy="4800600"/>
-          </a:xfrm>
-          <a:prstGeom prst="rect">
-            <a:avLst/>
-          </a:prstGeom>
-        </p:spPr>
-        <p:txBody>
-          <a:bodyPr wrap="square"/>
-          <a:lstStyle/>
-          <a:p>
-            <a:r>
-              <a:rPr lang="zh-CN" dirty="0"/>
-              <a:t>第 80 节 · 散点图与自动计算数据</a:t>
-            </a:r>
-          </a:p>
-          <a:p>
-            <a:r>
-              <a:rPr lang="zh-CN" dirty="0"/>
-              <a:t>单元 15 · Matplotlib 生成数据 · W18</a:t>
-            </a:r>
-          </a:p>
-          <a:p>
-            <a:r>
-              <a:rPr lang="zh-CN" dirty="0"/>
-              <a:t/>
-            </a:r>
-          </a:p>
-          <a:p>
-            <a:r>
-              <a:rPr lang="zh-CN" dirty="0"/>
-              <a:t>学习目标：掌握 scatter 的 s / c 两件套；会生成随机数据</a:t>
-            </a:r>
-          </a:p>
-          <a:p>
-            <a:r>
-              <a:rPr lang="zh-CN" dirty="0"/>
-              <a:t/>
-            </a:r>
-          </a:p>
-          <a:p>
-            <a:r>
-              <a:rPr lang="zh-CN" dirty="0"/>
-              <a:t>课堂实操（40 分钟，不看答案）：</a:t>
-            </a:r>
-          </a:p>
-          <a:p>
-            <a:r>
-              <a:rPr lang="zh-CN" dirty="0"/>
-              <a:t>· 画一张散点图并设置点大小</a:t>
-            </a:r>
-          </a:p>
-          <a:p>
-            <a:r>
-              <a:rPr lang="zh-CN" dirty="0"/>
-              <a:t>· 故意不设 s，看点为什么看起来一样大</a:t>
-            </a:r>
-          </a:p>
-          <a:p>
-            <a:r>
-              <a:rPr lang="zh-CN" dirty="0"/>
-              <a:t/>
-            </a:r>
-          </a:p>
-          <a:p>
-            <a:r>
-              <a:rPr lang="zh-CN" dirty="0"/>
-              <a:t>课后作业：</a:t>
-            </a:r>
-          </a:p>
-          <a:p>
-            <a:r>
-              <a:rPr lang="zh-CN" dirty="0"/>
-              <a:t>· 完成教材 15.2.4–15.2.6 动手练</a:t>
-            </a:r>
-          </a:p>
-          <a:p>
-            <a:r>
-              <a:rPr lang="zh-CN" dirty="0"/>
-              <a:t/>
-            </a:r>
-          </a:p>
-          <a:p>
-            <a:r>
-              <a:rPr lang="zh-CN" dirty="0"/>
-              <a:t>节奏：讲 20 分钟 → 学员自己敲 40 分钟（不看答案）→ 对讲评自查 20 分钟 → 写作业 10 分钟。</a:t>
-            </a:r>
-          </a:p>
-        </p:txBody>
-      </p:sp>
-      <p:sp>
-        <p:nvSpPr>
-          <p:cNvPr id="2" name="讲课提示"/>
-          <p:cNvSpPr txBox="1"/>
-          <p:nvPr/>
-        </p:nvSpPr>
-        <p:spPr>
-          <a:xfrm>
-            <a:off x="457200" y="457200"/>
-            <a:ext cx="6858000" cy="4800600"/>
-          </a:xfrm>
-          <a:prstGeom prst="rect">
-            <a:avLst/>
-          </a:prstGeom>
-        </p:spPr>
-        <p:txBody>
-          <a:bodyPr wrap="square"/>
-          <a:lstStyle/>
-          <a:p>
-            <a:r>
-              <a:rPr lang="zh-CN" dirty="0"/>
-              <a:t>第 80 节 · 散点图与自动计算数据</a:t>
-            </a:r>
-          </a:p>
-          <a:p>
-            <a:r>
-              <a:rPr lang="zh-CN" dirty="0"/>
-              <a:t>单元 15 · Matplotlib 生成数据 · W18</a:t>
-            </a:r>
-          </a:p>
-          <a:p>
-            <a:r>
-              <a:rPr lang="zh-CN" dirty="0"/>
-              <a:t/>
-            </a:r>
-          </a:p>
-          <a:p>
-            <a:r>
-              <a:rPr lang="zh-CN" dirty="0"/>
-              <a:t>学习目标：掌握 scatter 的 s / c 两件套；会生成随机数据</a:t>
-            </a:r>
-          </a:p>
-          <a:p>
-            <a:r>
-              <a:rPr lang="zh-CN" dirty="0"/>
-              <a:t/>
-            </a:r>
-          </a:p>
-          <a:p>
-            <a:r>
-              <a:rPr lang="zh-CN" dirty="0"/>
-              <a:t>课堂实操（40 分钟，不看答案）：</a:t>
-            </a:r>
-          </a:p>
-          <a:p>
-            <a:r>
-              <a:rPr lang="zh-CN" dirty="0"/>
-              <a:t>· 画一张散点图并设置点大小</a:t>
-            </a:r>
-          </a:p>
-          <a:p>
-            <a:r>
-              <a:rPr lang="zh-CN" dirty="0"/>
-              <a:t>· 故意不设 s，看点为什么看起来一样大</a:t>
-            </a:r>
-          </a:p>
-          <a:p>
-            <a:r>
-              <a:rPr lang="zh-CN" dirty="0"/>
-              <a:t/>
-            </a:r>
-          </a:p>
-          <a:p>
-            <a:r>
-              <a:rPr lang="zh-CN" dirty="0"/>
-              <a:t>课后作业：</a:t>
-            </a:r>
-          </a:p>
-          <a:p>
-            <a:r>
-              <a:rPr lang="zh-CN" dirty="0"/>
-              <a:t>· 完成教材 15.2.4–15.2.6 动手练</a:t>
-            </a:r>
-          </a:p>
-          <a:p>
-            <a:r>
-              <a:rPr lang="zh-CN" dirty="0"/>
-              <a:t/>
-            </a:r>
-          </a:p>
-          <a:p>
-            <a:r>
-              <a:rPr lang="zh-CN" dirty="0"/>
-              <a:t>节奏：讲 20 分钟 → 学员自己敲 40 分钟（不看答案）→ 对讲评自查 20 分钟 → 写作业 10 分钟。</a:t>
-            </a:r>
-          </a:p>
-        </p:txBody>
-      </p:sp>
-    </p:spTree>
-  </p:cSld>
-  <p:clrMapOvr>
-    <a:masterClrMapping/>
-  </p:clrMapOvr>
-</p:notes>
-</file>
-
-<file path=ppt/notesSlides/notesSlide5.xml><?xml version="1.0" encoding="utf-8"?>
-<p:notes xmlns:a="http://schemas.openxmlformats.org/drawingml/2006/main" xmlns:p="http://schemas.openxmlformats.org/presentationml/2006/main" xmlns:r="http://schemas.openxmlformats.org/officeDocument/2006/relationships">
-  <p:cSld>
-    <p:spTree>
-      <p:nvGrpSpPr>
-        <p:cNvPr id="1" name=""/>
-        <p:cNvGrpSpPr/>
-        <p:nvPr/>
-      </p:nvGrpSpPr>
-      <p:grpSpPr>
-        <a:xfrm>
-          <a:off x="0" y="0"/>
-          <a:ext cx="0" cy="0"/>
-          <a:chOff x="0" y="0"/>
-          <a:chExt cx="0" cy="0"/>
-        </a:xfrm>
-      </p:grpSpPr>
-      <p:sp>
-        <p:nvSpPr>
-          <p:cNvPr id="2" name="讲课提示"/>
-          <p:cNvSpPr txBox="1"/>
-          <p:nvPr/>
-        </p:nvSpPr>
-        <p:spPr>
-          <a:xfrm>
-            <a:off x="457200" y="457200"/>
-            <a:ext cx="6858000" cy="4800600"/>
-          </a:xfrm>
-          <a:prstGeom prst="rect">
-            <a:avLst/>
-          </a:prstGeom>
-        </p:spPr>
-        <p:txBody>
-          <a:bodyPr wrap="square"/>
-          <a:lstStyle/>
-          <a:p>
-            <a:r>
-              <a:rPr lang="zh-CN" dirty="0"/>
-              <a:t>第 80 节 · 核心知识点：散点图与自动计算数据</a:t>
-            </a:r>
-          </a:p>
-          <a:p>
-            <a:r>
-              <a:rPr lang="zh-CN" dirty="0"/>
-              <a:t/>
-            </a:r>
-          </a:p>
-          <a:p>
-            <a:r>
-              <a:rPr lang="zh-CN" dirty="0"/>
-              <a:t>讲这一页时：先让学生说出上节课的结论，再逐块讲要点。</a:t>
-            </a:r>
-          </a:p>
-          <a:p>
-            <a:r>
-              <a:rPr lang="zh-CN" dirty="0"/>
-              <a:t>每讲完一块，问一句「这一步如果写错了，报错会长什么样？」——把错误提前讲。</a:t>
-            </a:r>
-          </a:p>
-          <a:p>
-            <a:r>
-              <a:rPr lang="zh-CN" dirty="0"/>
-              <a:t/>
-            </a:r>
-          </a:p>
-          <a:p>
-            <a:r>
-              <a:rPr lang="zh-CN" dirty="0"/>
-              <a:t>本节目标：掌握 scatter 的 s / c 两件套；会生成随机数据</a:t>
-            </a:r>
-          </a:p>
-          <a:p>
-            <a:r>
-              <a:rPr lang="zh-CN" dirty="0"/>
-              <a:t/>
-            </a:r>
-          </a:p>
-          <a:p>
-            <a:r>
-              <a:rPr lang="zh-CN" dirty="0"/>
-              <a:t>看不到懂的地方，回讲义对应小节读一遍，再回来对着这页复述一次——能讲出来才算真懂。</a:t>
-            </a:r>
-          </a:p>
-        </p:txBody>
-      </p:sp>
-      <p:sp>
-        <p:nvSpPr>
-          <p:cNvPr id="2" name="讲课提示"/>
-          <p:cNvSpPr txBox="1"/>
-          <p:nvPr/>
-        </p:nvSpPr>
-        <p:spPr>
-          <a:xfrm>
-            <a:off x="457200" y="457200"/>
-            <a:ext cx="6858000" cy="4800600"/>
-          </a:xfrm>
-          <a:prstGeom prst="rect">
-            <a:avLst/>
-          </a:prstGeom>
-        </p:spPr>
-        <p:txBody>
-          <a:bodyPr wrap="square"/>
-          <a:lstStyle/>
-          <a:p>
-            <a:r>
-              <a:rPr lang="zh-CN" dirty="0"/>
-              <a:t>第 80 节 · 核心知识点：散点图与自动计算数据</a:t>
-            </a:r>
-          </a:p>
-          <a:p>
-            <a:r>
-              <a:rPr lang="zh-CN" dirty="0"/>
-              <a:t/>
-            </a:r>
-          </a:p>
-          <a:p>
-            <a:r>
-              <a:rPr lang="zh-CN" dirty="0"/>
-              <a:t>讲这一页时：先让学生说出上节课的结论，再逐块讲要点。</a:t>
-            </a:r>
-          </a:p>
-          <a:p>
-            <a:r>
-              <a:rPr lang="zh-CN" dirty="0"/>
-              <a:t>每讲完一块，问一句「这一步如果写错了，报错会长什么样？」——把错误提前讲。</a:t>
-            </a:r>
-          </a:p>
-          <a:p>
-            <a:r>
-              <a:rPr lang="zh-CN" dirty="0"/>
-              <a:t/>
-            </a:r>
-          </a:p>
-          <a:p>
-            <a:r>
-              <a:rPr lang="zh-CN" dirty="0"/>
-              <a:t>本节目标：掌握 scatter 的 s / c 两件套；会生成随机数据</a:t>
-            </a:r>
-          </a:p>
-          <a:p>
-            <a:r>
-              <a:rPr lang="zh-CN" dirty="0"/>
-              <a:t/>
-            </a:r>
-          </a:p>
-          <a:p>
-            <a:r>
-              <a:rPr lang="zh-CN" dirty="0"/>
-              <a:t>看不到懂的地方，回讲义对应小节读一遍，再回来对着这页复述一次——能讲出来才算真懂。</a:t>
-            </a:r>
-          </a:p>
-        </p:txBody>
-      </p:sp>
-    </p:spTree>
-  </p:cSld>
-  <p:clrMapOvr>
-    <a:masterClrMapping/>
-  </p:clrMapOvr>
-</p:notes>
-</file>
-
-<file path=ppt/notesSlides/notesSlide6.xml><?xml version="1.0" encoding="utf-8"?>
-<p:notes xmlns:a="http://schemas.openxmlformats.org/drawingml/2006/main" xmlns:p="http://schemas.openxmlformats.org/presentationml/2006/main" xmlns:r="http://schemas.openxmlformats.org/officeDocument/2006/relationships">
-  <p:cSld>
-    <p:spTree>
-      <p:nvGrpSpPr>
-        <p:cNvPr id="1" name=""/>
-        <p:cNvGrpSpPr/>
-        <p:nvPr/>
-      </p:nvGrpSpPr>
-      <p:grpSpPr>
-        <a:xfrm>
-          <a:off x="0" y="0"/>
-          <a:ext cx="0" cy="0"/>
-          <a:chOff x="0" y="0"/>
-          <a:chExt cx="0" cy="0"/>
-        </a:xfrm>
-      </p:grpSpPr>
-      <p:sp>
-        <p:nvSpPr>
-          <p:cNvPr id="2" name="讲课提示"/>
-          <p:cNvSpPr txBox="1"/>
-          <p:nvPr/>
-        </p:nvSpPr>
-        <p:spPr>
-          <a:xfrm>
-            <a:off x="457200" y="457200"/>
-            <a:ext cx="6858000" cy="4800600"/>
-          </a:xfrm>
-          <a:prstGeom prst="rect">
-            <a:avLst/>
-          </a:prstGeom>
-        </p:spPr>
-        <p:txBody>
-          <a:bodyPr wrap="square"/>
-          <a:lstStyle/>
-          <a:p>
-            <a:r>
-              <a:rPr lang="zh-CN" dirty="0"/>
-              <a:t>第 81 节 · ★ 校正绘图、刻度与颜色映射</a:t>
-            </a:r>
-          </a:p>
-          <a:p>
-            <a:r>
-              <a:rPr lang="zh-CN" dirty="0"/>
-              <a:t>单元 15 · Matplotlib 生成数据 · W18–W19</a:t>
-            </a:r>
-          </a:p>
-          <a:p>
-            <a:r>
-              <a:rPr lang="zh-CN" dirty="0"/>
-              <a:t/>
-            </a:r>
-          </a:p>
-          <a:p>
-            <a:r>
-              <a:rPr lang="zh-CN" dirty="0"/>
-              <a:t>学习目标：会用 `axis()` 留边距（最高频的坑）；会定制刻度、颜色与颜色映射</a:t>
-            </a:r>
-          </a:p>
-          <a:p>
-            <a:r>
-              <a:rPr lang="zh-CN" dirty="0"/>
-              <a:t/>
-            </a:r>
-          </a:p>
-          <a:p>
-            <a:r>
-              <a:rPr lang="zh-CN" dirty="0"/>
-              <a:t>课堂实操（40 分钟，不看答案）：</a:t>
-            </a:r>
-          </a:p>
-          <a:p>
-            <a:r>
-              <a:rPr lang="zh-CN" dirty="0"/>
-              <a:t>· ★ 现场演示不调 axis() 时点被裁掉</a:t>
-            </a:r>
-          </a:p>
-          <a:p>
-            <a:r>
-              <a:rPr lang="zh-CN" dirty="0"/>
-              <a:t>· 用 Blues 渐变画散点图</a:t>
-            </a:r>
-          </a:p>
-          <a:p>
-            <a:r>
-              <a:rPr lang="zh-CN" dirty="0"/>
-              <a:t/>
-            </a:r>
-          </a:p>
-          <a:p>
-            <a:r>
-              <a:rPr lang="zh-CN" dirty="0"/>
-              <a:t>课后作业：</a:t>
-            </a:r>
-          </a:p>
-          <a:p>
-            <a:r>
-              <a:rPr lang="zh-CN" dirty="0"/>
-              <a:t>· 完成教材 15.2.7–15.2.10 动手练</a:t>
-            </a:r>
-          </a:p>
-          <a:p>
-            <a:r>
-              <a:rPr lang="zh-CN" dirty="0"/>
-              <a:t/>
-            </a:r>
-          </a:p>
-          <a:p>
-            <a:r>
-              <a:rPr lang="zh-CN" dirty="0"/>
-              <a:t>节奏：讲 20 分钟 → 学员自己敲 40 分钟（不看答案）→ 对讲评自查 20 分钟 → 写作业 10 分钟。</a:t>
-            </a:r>
-          </a:p>
-        </p:txBody>
-      </p:sp>
-      <p:sp>
-        <p:nvSpPr>
-          <p:cNvPr id="2" name="讲课提示"/>
-          <p:cNvSpPr txBox="1"/>
-          <p:nvPr/>
-        </p:nvSpPr>
-        <p:spPr>
-          <a:xfrm>
-            <a:off x="457200" y="457200"/>
-            <a:ext cx="6858000" cy="4800600"/>
-          </a:xfrm>
-          <a:prstGeom prst="rect">
-            <a:avLst/>
-          </a:prstGeom>
-        </p:spPr>
-        <p:txBody>
-          <a:bodyPr wrap="square"/>
-          <a:lstStyle/>
-          <a:p>
-            <a:r>
-              <a:rPr lang="zh-CN" dirty="0"/>
-              <a:t>第 81 节 · ★ 校正绘图、刻度与颜色映射</a:t>
-            </a:r>
-          </a:p>
-          <a:p>
-            <a:r>
-              <a:rPr lang="zh-CN" dirty="0"/>
-              <a:t>单元 15 · Matplotlib 生成数据 · W18–W19</a:t>
-            </a:r>
-          </a:p>
-          <a:p>
-            <a:r>
-              <a:rPr lang="zh-CN" dirty="0"/>
-              <a:t/>
-            </a:r>
-          </a:p>
-          <a:p>
-            <a:r>
-              <a:rPr lang="zh-CN" dirty="0"/>
-              <a:t>学习目标：会用 `axis()` 留边距（最高频的坑）；会定制刻度、颜色与颜色映射</a:t>
-            </a:r>
-          </a:p>
-          <a:p>
-            <a:r>
-              <a:rPr lang="zh-CN" dirty="0"/>
-              <a:t/>
-            </a:r>
-          </a:p>
-          <a:p>
-            <a:r>
-              <a:rPr lang="zh-CN" dirty="0"/>
-              <a:t>课堂实操（40 分钟，不看答案）：</a:t>
-            </a:r>
-          </a:p>
-          <a:p>
-            <a:r>
-              <a:rPr lang="zh-CN" dirty="0"/>
-              <a:t>· ★ 现场演示不调 axis() 时点被裁掉</a:t>
-            </a:r>
-          </a:p>
-          <a:p>
-            <a:r>
-              <a:rPr lang="zh-CN" dirty="0"/>
-              <a:t>· 用 Blues 渐变画散点图</a:t>
-            </a:r>
-          </a:p>
-          <a:p>
-            <a:r>
-              <a:rPr lang="zh-CN" dirty="0"/>
-              <a:t/>
-            </a:r>
-          </a:p>
-          <a:p>
-            <a:r>
-              <a:rPr lang="zh-CN" dirty="0"/>
-              <a:t>课后作业：</a:t>
-            </a:r>
-          </a:p>
-          <a:p>
-            <a:r>
-              <a:rPr lang="zh-CN" dirty="0"/>
-              <a:t>· 完成教材 15.2.7–15.2.10 动手练</a:t>
-            </a:r>
-          </a:p>
-          <a:p>
-            <a:r>
-              <a:rPr lang="zh-CN" dirty="0"/>
-              <a:t/>
-            </a:r>
-          </a:p>
-          <a:p>
-            <a:r>
-              <a:rPr lang="zh-CN" dirty="0"/>
-              <a:t>节奏：讲 20 分钟 → 学员自己敲 40 分钟（不看答案）→ 对讲评自查 20 分钟 → 写作业 10 分钟。</a:t>
-            </a:r>
-          </a:p>
-        </p:txBody>
-      </p:sp>
-    </p:spTree>
-  </p:cSld>
-  <p:clrMapOvr>
-    <a:masterClrMapping/>
-  </p:clrMapOvr>
-</p:notes>
-</file>
-
-<file path=ppt/notesSlides/notesSlide7.xml><?xml version="1.0" encoding="utf-8"?>
-<p:notes xmlns:a="http://schemas.openxmlformats.org/drawingml/2006/main" xmlns:p="http://schemas.openxmlformats.org/presentationml/2006/main" xmlns:r="http://schemas.openxmlformats.org/officeDocument/2006/relationships">
-  <p:cSld>
-    <p:spTree>
-      <p:nvGrpSpPr>
-        <p:cNvPr id="1" name=""/>
-        <p:cNvGrpSpPr/>
-        <p:nvPr/>
-      </p:nvGrpSpPr>
-      <p:grpSpPr>
-        <a:xfrm>
-          <a:off x="0" y="0"/>
-          <a:ext cx="0" cy="0"/>
-          <a:chOff x="0" y="0"/>
-          <a:chExt cx="0" cy="0"/>
-        </a:xfrm>
-      </p:grpSpPr>
-      <p:sp>
-        <p:nvSpPr>
-          <p:cNvPr id="2" name="讲课提示"/>
-          <p:cNvSpPr txBox="1"/>
-          <p:nvPr/>
-        </p:nvSpPr>
-        <p:spPr>
-          <a:xfrm>
-            <a:off x="457200" y="457200"/>
-            <a:ext cx="6858000" cy="4800600"/>
-          </a:xfrm>
-          <a:prstGeom prst="rect">
-            <a:avLst/>
-          </a:prstGeom>
-        </p:spPr>
-        <p:txBody>
-          <a:bodyPr wrap="square"/>
-          <a:lstStyle/>
-          <a:p>
-            <a:r>
-              <a:rPr lang="zh-CN" dirty="0"/>
-              <a:t>第 81 节 · 核心知识点：★ 校正绘图、刻度与颜色映射</a:t>
-            </a:r>
-          </a:p>
-          <a:p>
-            <a:r>
-              <a:rPr lang="zh-CN" dirty="0"/>
-              <a:t/>
-            </a:r>
-          </a:p>
-          <a:p>
-            <a:r>
-              <a:rPr lang="zh-CN" dirty="0"/>
-              <a:t>讲这一页时：先让学生说出上节课的结论，再逐块讲要点。</a:t>
-            </a:r>
-          </a:p>
-          <a:p>
-            <a:r>
-              <a:rPr lang="zh-CN" dirty="0"/>
-              <a:t>每讲完一块，问一句「这一步如果写错了，报错会长什么样？」——把错误提前讲。</a:t>
-            </a:r>
-          </a:p>
-          <a:p>
-            <a:r>
-              <a:rPr lang="zh-CN" dirty="0"/>
-              <a:t/>
-            </a:r>
-          </a:p>
-          <a:p>
-            <a:r>
-              <a:rPr lang="zh-CN" dirty="0"/>
-              <a:t>本节目标：会用 `axis()` 留边距（最高频的坑）；会定制刻度、颜色与颜色映射</a:t>
-            </a:r>
-          </a:p>
-          <a:p>
-            <a:r>
-              <a:rPr lang="zh-CN" dirty="0"/>
-              <a:t/>
-            </a:r>
-          </a:p>
-          <a:p>
-            <a:r>
-              <a:rPr lang="zh-CN" dirty="0"/>
-              <a:t>看不到懂的地方，回讲义对应小节读一遍，再回来对着这页复述一次——能讲出来才算真懂。</a:t>
-            </a:r>
-          </a:p>
-        </p:txBody>
-      </p:sp>
-      <p:sp>
-        <p:nvSpPr>
-          <p:cNvPr id="2" name="讲课提示"/>
-          <p:cNvSpPr txBox="1"/>
-          <p:nvPr/>
-        </p:nvSpPr>
-        <p:spPr>
-          <a:xfrm>
-            <a:off x="457200" y="457200"/>
-            <a:ext cx="6858000" cy="4800600"/>
-          </a:xfrm>
-          <a:prstGeom prst="rect">
-            <a:avLst/>
-          </a:prstGeom>
-        </p:spPr>
-        <p:txBody>
-          <a:bodyPr wrap="square"/>
-          <a:lstStyle/>
-          <a:p>
-            <a:r>
-              <a:rPr lang="zh-CN" dirty="0"/>
-              <a:t>第 81 节 · 核心知识点：★ 校正绘图、刻度与颜色映射</a:t>
-            </a:r>
-          </a:p>
-          <a:p>
-            <a:r>
-              <a:rPr lang="zh-CN" dirty="0"/>
-              <a:t/>
-            </a:r>
-          </a:p>
-          <a:p>
-            <a:r>
-              <a:rPr lang="zh-CN" dirty="0"/>
-              <a:t>讲这一页时：先让学生说出上节课的结论，再逐块讲要点。</a:t>
-            </a:r>
-          </a:p>
-          <a:p>
-            <a:r>
-              <a:rPr lang="zh-CN" dirty="0"/>
-              <a:t>每讲完一块，问一句「这一步如果写错了，报错会长什么样？」——把错误提前讲。</a:t>
-            </a:r>
-          </a:p>
-          <a:p>
-            <a:r>
-              <a:rPr lang="zh-CN" dirty="0"/>
-              <a:t/>
-            </a:r>
-          </a:p>
-          <a:p>
-            <a:r>
-              <a:rPr lang="zh-CN" dirty="0"/>
-              <a:t>本节目标：会用 `axis()` 留边距（最高频的坑）；会定制刻度、颜色与颜色映射</a:t>
-            </a:r>
-          </a:p>
-          <a:p>
-            <a:r>
-              <a:rPr lang="zh-CN" dirty="0"/>
-              <a:t/>
-            </a:r>
-          </a:p>
-          <a:p>
-            <a:r>
-              <a:rPr lang="zh-CN" dirty="0"/>
-              <a:t>看不到懂的地方，回讲义对应小节读一遍，再回来对着这页复述一次——能讲出来才算真懂。</a:t>
-            </a:r>
-          </a:p>
-        </p:txBody>
-      </p:sp>
-    </p:spTree>
-  </p:cSld>
-  <p:clrMapOvr>
-    <a:masterClrMapping/>
-  </p:clrMapOvr>
-</p:notes>
-</file>
-
-<file path=ppt/notesSlides/notesSlide8.xml><?xml version="1.0" encoding="utf-8"?>
-<p:notes xmlns:a="http://schemas.openxmlformats.org/drawingml/2006/main" xmlns:p="http://schemas.openxmlformats.org/presentationml/2006/main" xmlns:r="http://schemas.openxmlformats.org/officeDocument/2006/relationships">
-  <p:cSld>
-    <p:spTree>
-      <p:nvGrpSpPr>
-        <p:cNvPr id="1" name=""/>
-        <p:cNvGrpSpPr/>
-        <p:nvPr/>
-      </p:nvGrpSpPr>
-      <p:grpSpPr>
-        <a:xfrm>
-          <a:off x="0" y="0"/>
-          <a:ext cx="0" cy="0"/>
-          <a:chOff x="0" y="0"/>
-          <a:chExt cx="0" cy="0"/>
-        </a:xfrm>
-      </p:grpSpPr>
-      <p:sp>
-        <p:nvSpPr>
-          <p:cNvPr id="2" name="讲课提示"/>
-          <p:cNvSpPr txBox="1"/>
-          <p:nvPr/>
-        </p:nvSpPr>
-        <p:spPr>
-          <a:xfrm>
-            <a:off x="457200" y="457200"/>
-            <a:ext cx="6858000" cy="4800600"/>
-          </a:xfrm>
-          <a:prstGeom prst="rect">
-            <a:avLst/>
-          </a:prstGeom>
-        </p:spPr>
-        <p:txBody>
-          <a:bodyPr wrap="square"/>
-          <a:lstStyle/>
-          <a:p>
-            <a:r>
-              <a:rPr lang="zh-CN" dirty="0"/>
-              <a:t>第 82 节 · 随机游走 RandomWalk 类</a:t>
-            </a:r>
-          </a:p>
-          <a:p>
-            <a:r>
-              <a:rPr lang="zh-CN" dirty="0"/>
-              <a:t>单元 15 · Matplotlib 生成数据 · W19</a:t>
-            </a:r>
-          </a:p>
-          <a:p>
-            <a:r>
-              <a:rPr lang="zh-CN" dirty="0"/>
-              <a:t/>
-            </a:r>
-          </a:p>
-          <a:p>
-            <a:r>
-              <a:rPr lang="zh-CN" dirty="0"/>
-              <a:t>学习目标：能写 RandomWalk 类并模拟多次游走；理解 fill_walk 拒绝原地不动的逻辑</a:t>
-            </a:r>
-          </a:p>
-          <a:p>
-            <a:r>
-              <a:rPr lang="zh-CN" dirty="0"/>
-              <a:t/>
-            </a:r>
-          </a:p>
-          <a:p>
-            <a:r>
-              <a:rPr lang="zh-CN" dirty="0"/>
-              <a:t>课堂实操（40 分钟，不看答案）：</a:t>
-            </a:r>
-          </a:p>
-          <a:p>
-            <a:r>
-              <a:rPr lang="zh-CN" dirty="0"/>
-              <a:t>· 实现 fill_walk 并画一条路径</a:t>
-            </a:r>
-          </a:p>
-          <a:p>
-            <a:r>
-              <a:rPr lang="zh-CN" dirty="0"/>
-              <a:t>· 模拟 5000 条路径，保存成 PNG</a:t>
-            </a:r>
-          </a:p>
-          <a:p>
-            <a:r>
-              <a:rPr lang="zh-CN" dirty="0"/>
-              <a:t/>
-            </a:r>
-          </a:p>
-          <a:p>
-            <a:r>
-              <a:rPr lang="zh-CN" dirty="0"/>
-              <a:t>课后作业：</a:t>
-            </a:r>
-          </a:p>
-          <a:p>
-            <a:r>
-              <a:rPr lang="zh-CN" dirty="0"/>
-              <a:t>· ★ 产出：随机游走图脚本</a:t>
-            </a:r>
-          </a:p>
-          <a:p>
-            <a:r>
-              <a:rPr lang="zh-CN" dirty="0"/>
-              <a:t/>
-            </a:r>
-          </a:p>
-          <a:p>
-            <a:r>
-              <a:rPr lang="zh-CN" dirty="0"/>
-              <a:t>节奏：讲 20 分钟 → 学员自己敲 40 分钟（不看答案）→ 对讲评自查 20 分钟 → 写作业 10 分钟。</a:t>
-            </a:r>
-          </a:p>
-        </p:txBody>
-      </p:sp>
-      <p:sp>
-        <p:nvSpPr>
-          <p:cNvPr id="2" name="讲课提示"/>
-          <p:cNvSpPr txBox="1"/>
-          <p:nvPr/>
-        </p:nvSpPr>
-        <p:spPr>
-          <a:xfrm>
-            <a:off x="457200" y="457200"/>
-            <a:ext cx="6858000" cy="4800600"/>
-          </a:xfrm>
-          <a:prstGeom prst="rect">
-            <a:avLst/>
-          </a:prstGeom>
-        </p:spPr>
-        <p:txBody>
-          <a:bodyPr wrap="square"/>
-          <a:lstStyle/>
-          <a:p>
-            <a:r>
-              <a:rPr lang="zh-CN" dirty="0"/>
-              <a:t>第 82 节 · 随机游走 RandomWalk 类</a:t>
-            </a:r>
-          </a:p>
-          <a:p>
-            <a:r>
-              <a:rPr lang="zh-CN" dirty="0"/>
-              <a:t>单元 15 · Matplotlib 生成数据 · W19</a:t>
-            </a:r>
-          </a:p>
-          <a:p>
-            <a:r>
-              <a:rPr lang="zh-CN" dirty="0"/>
-              <a:t/>
-            </a:r>
-          </a:p>
-          <a:p>
-            <a:r>
-              <a:rPr lang="zh-CN" dirty="0"/>
-              <a:t>学习目标：能写 RandomWalk 类并模拟多次游走；理解 fill_walk 拒绝原地不动的逻辑</a:t>
-            </a:r>
-          </a:p>
-          <a:p>
-            <a:r>
-              <a:rPr lang="zh-CN" dirty="0"/>
-              <a:t/>
-            </a:r>
-          </a:p>
-          <a:p>
-            <a:r>
-              <a:rPr lang="zh-CN" dirty="0"/>
-              <a:t>课堂实操（40 分钟，不看答案）：</a:t>
-            </a:r>
-          </a:p>
-          <a:p>
-            <a:r>
-              <a:rPr lang="zh-CN" dirty="0"/>
-              <a:t>· 实现 fill_walk 并画一条路径</a:t>
-            </a:r>
-          </a:p>
-          <a:p>
-            <a:r>
-              <a:rPr lang="zh-CN" dirty="0"/>
-              <a:t>· 模拟 5000 条路径，保存成 PNG</a:t>
-            </a:r>
-          </a:p>
-          <a:p>
-            <a:r>
-              <a:rPr lang="zh-CN" dirty="0"/>
-              <a:t/>
-            </a:r>
-          </a:p>
-          <a:p>
-            <a:r>
-              <a:rPr lang="zh-CN" dirty="0"/>
-              <a:t>课后作业：</a:t>
-            </a:r>
-          </a:p>
-          <a:p>
-            <a:r>
-              <a:rPr lang="zh-CN" dirty="0"/>
-              <a:t>· ★ 产出：随机游走图脚本</a:t>
-            </a:r>
-          </a:p>
-          <a:p>
-            <a:r>
-              <a:rPr lang="zh-CN" dirty="0"/>
-              <a:t/>
-            </a:r>
-          </a:p>
-          <a:p>
-            <a:r>
-              <a:rPr lang="zh-CN" dirty="0"/>
-              <a:t>节奏：讲 20 分钟 → 学员自己敲 40 分钟（不看答案）→ 对讲评自查 20 分钟 → 写作业 10 分钟。</a:t>
-            </a:r>
-          </a:p>
-        </p:txBody>
-      </p:sp>
-    </p:spTree>
-  </p:cSld>
-  <p:clrMapOvr>
-    <a:masterClrMapping/>
-  </p:clrMapOvr>
-</p:notes>
-</file>
-
-<file path=ppt/notesSlides/notesSlide9.xml><?xml version="1.0" encoding="utf-8"?>
-<p:notes xmlns:a="http://schemas.openxmlformats.org/drawingml/2006/main" xmlns:p="http://schemas.openxmlformats.org/presentationml/2006/main" xmlns:r="http://schemas.openxmlformats.org/officeDocument/2006/relationships">
-  <p:cSld>
-    <p:spTree>
-      <p:nvGrpSpPr>
-        <p:cNvPr id="1" name=""/>
-        <p:cNvGrpSpPr/>
-        <p:nvPr/>
-      </p:nvGrpSpPr>
-      <p:grpSpPr>
-        <a:xfrm>
-          <a:off x="0" y="0"/>
-          <a:ext cx="0" cy="0"/>
-          <a:chOff x="0" y="0"/>
-          <a:chExt cx="0" cy="0"/>
-        </a:xfrm>
-      </p:grpSpPr>
-      <p:sp>
-        <p:nvSpPr>
-          <p:cNvPr id="2" name="讲课提示"/>
-          <p:cNvSpPr txBox="1"/>
-          <p:nvPr/>
-        </p:nvSpPr>
-        <p:spPr>
-          <a:xfrm>
-            <a:off x="457200" y="457200"/>
-            <a:ext cx="6858000" cy="4800600"/>
-          </a:xfrm>
-          <a:prstGeom prst="rect">
-            <a:avLst/>
-          </a:prstGeom>
-        </p:spPr>
-        <p:txBody>
-          <a:bodyPr wrap="square"/>
-          <a:lstStyle/>
-          <a:p>
-            <a:r>
-              <a:rPr lang="zh-CN" dirty="0"/>
-              <a:t>第 82 节 · 核心知识点：随机游走 RandomWalk 类</a:t>
-            </a:r>
-          </a:p>
-          <a:p>
-            <a:r>
-              <a:rPr lang="zh-CN" dirty="0"/>
-              <a:t/>
-            </a:r>
-          </a:p>
-          <a:p>
-            <a:r>
-              <a:rPr lang="zh-CN" dirty="0"/>
-              <a:t>讲这一页时：先让学生说出上节课的结论，再逐块讲要点。</a:t>
-            </a:r>
-          </a:p>
-          <a:p>
-            <a:r>
-              <a:rPr lang="zh-CN" dirty="0"/>
-              <a:t>每讲完一块，问一句「这一步如果写错了，报错会长什么样？」——把错误提前讲。</a:t>
-            </a:r>
-          </a:p>
-          <a:p>
-            <a:r>
-              <a:rPr lang="zh-CN" dirty="0"/>
-              <a:t/>
-            </a:r>
-          </a:p>
-          <a:p>
-            <a:r>
-              <a:rPr lang="zh-CN" dirty="0"/>
-              <a:t>本节目标：能写 RandomWalk 类并模拟多次游走；理解 fill_walk 拒绝原地不动的逻辑</a:t>
-            </a:r>
-          </a:p>
-          <a:p>
-            <a:r>
-              <a:rPr lang="zh-CN" dirty="0"/>
-              <a:t/>
-            </a:r>
-          </a:p>
-          <a:p>
-            <a:r>
-              <a:rPr lang="zh-CN" dirty="0"/>
-              <a:t>看不到懂的地方，回讲义对应小节读一遍，再回来对着这页复述一次——能讲出来才算真懂。</a:t>
-            </a:r>
-          </a:p>
-        </p:txBody>
-      </p:sp>
-      <p:sp>
-        <p:nvSpPr>
-          <p:cNvPr id="2" name="讲课提示"/>
-          <p:cNvSpPr txBox="1"/>
-          <p:nvPr/>
-        </p:nvSpPr>
-        <p:spPr>
-          <a:xfrm>
-            <a:off x="457200" y="457200"/>
-            <a:ext cx="6858000" cy="4800600"/>
-          </a:xfrm>
-          <a:prstGeom prst="rect">
-            <a:avLst/>
-          </a:prstGeom>
-        </p:spPr>
-        <p:txBody>
-          <a:bodyPr wrap="square"/>
-          <a:lstStyle/>
-          <a:p>
-            <a:r>
-              <a:rPr lang="zh-CN" dirty="0"/>
-              <a:t>第 82 节 · 核心知识点：随机游走 RandomWalk 类</a:t>
-            </a:r>
-          </a:p>
-          <a:p>
-            <a:r>
-              <a:rPr lang="zh-CN" dirty="0"/>
-              <a:t/>
-            </a:r>
-          </a:p>
-          <a:p>
-            <a:r>
-              <a:rPr lang="zh-CN" dirty="0"/>
-              <a:t>讲这一页时：先让学生说出上节课的结论，再逐块讲要点。</a:t>
-            </a:r>
-          </a:p>
-          <a:p>
-            <a:r>
-              <a:rPr lang="zh-CN" dirty="0"/>
-              <a:t>每讲完一块，问一句「这一步如果写错了，报错会长什么样？」——把错误提前讲。</a:t>
-            </a:r>
-          </a:p>
-          <a:p>
-            <a:r>
-              <a:rPr lang="zh-CN" dirty="0"/>
-              <a:t/>
-            </a:r>
-          </a:p>
-          <a:p>
-            <a:r>
-              <a:rPr lang="zh-CN" dirty="0"/>
-              <a:t>本节目标：能写 RandomWalk 类并模拟多次游走；理解 fill_walk 拒绝原地不动的逻辑</a:t>
-            </a:r>
-          </a:p>
-          <a:p>
-            <a:r>
-              <a:rPr lang="zh-CN" dirty="0"/>
-              <a:t/>
-            </a:r>
-          </a:p>
-          <a:p>
-            <a:r>
-              <a:rPr lang="zh-CN" dirty="0"/>
-              <a:t>看不到懂的地方，回讲义对应小节读一遍，再回来对着这页复述一次——能讲出来才算真懂。</a:t>
-            </a:r>
-          </a:p>
-        </p:txBody>
-      </p:sp>
-    </p:spTree>
-  </p:cSld>
-  <p:clrMapOvr>
-    <a:masterClrMapping/>
-  </p:clrMapOvr>
-</p:notes>
-</file>
-
 <file path=ppt/slideLayouts/slideLayout1.xml><?xml version="1.0" encoding="utf-8"?>
 <p:sldLayout xmlns:p="http://schemas.openxmlformats.org/presentationml/2006/main" xmlns:a="http://schemas.openxmlformats.org/drawingml/2006/main">
   <p:cSld name="DEFAULT">
@@ -2763,7 +555,7 @@
   <p:cSld>
     <p:spTree>
       <p:nvGrpSpPr>
-        <p:cNvPr id="1" name="" descr="&lt;Slide style={{ width: '1280px', height: '720px', backgroundColor: '#FAFCFE', padding: 0, position: 'relative', overflow: 'hidden' }}&gt;&#13;&#10;    &lt;Box style={{ position: 'absolute', left: 0, top: 0, width: '1280px', height: '150px', background: '#1F5FA8' }} /&gt;&#13;&#10;    &lt;Box style={{ position: 'absolute', left: 64, top: 34, width: '1152px', flexDirection: 'column' }}&gt;&#13;&#10;        &lt;Text style={{ fontSize: 15, fontWeight: 'bold', color: '#BFD9F2', letterSpacing: 2 }}&gt;阶段 2 · 单元 15&lt;/Text&gt;&#13;&#10;        &lt;Text style={{ fontSize: 38, fontWeight: 'bold', color: '#FFFFFF', marginTop: 6 }}&gt;Matplotlib 生成数据&lt;/Text&gt;&#13;&#10;    &lt;/Box&gt;&#13;&#10;    &lt;Box style={{ position: 'absolute', left: 64, top: 168, width: '1152px', height: 470 }}&gt;&#13;&#10;        &lt;svg width='1152' height='470' viewBox='0 0 1152 470'&gt;&#13;&#10;            &lt;text x='0' y='18' fontSize='15' fontWeight='bold' fill='#16232E' fontFamily='Microsoft YaHei'&gt;本单元共 5 节课&lt;/text&gt;&#13;&#10;            &lt;rect x='0' y='196' width='1152' height='38' rx='7' fill='#FFFFFF' /&gt;&lt;text x='16' y='221' fontSize='15' fontWeight='bold' fill='#1F5FA8' fontFamily='Microsoft YaHei'&gt;第 79 节&lt;/text&gt;&lt;text x='96' y='221' fontSize='15' fill='#16232E' fontFamily='Microsoft YaHei'&gt;Matplotlib 入门与折线图&lt;/text&gt;&lt;text x='1080' y='221' fontSize='13' fill='#5A6B7A' textAnchor='end' fontFamily='Microsoft YaHei'&gt;W18&lt;/text&gt;&lt;rect x='0' y='238' width='1152' height='38' rx='7' fill='#F2F7FD' /&gt;&lt;text x='16' y='263' fontSize='15' fontWeight='bold' fill='#1F5FA8' fontFamily='Microsoft YaHei'&gt;第 80 节&lt;/text&gt;&lt;text x='96' y='263' fontSize='15' fill='#16232E' fontFamily='Microsoft YaHei'&gt;散点图与自动计算数据&lt;/text&gt;&lt;text x='1080' y='263' fontSize='13' fill='#5A6B7A' textAnchor='end' fontFamily='Microsoft YaHei'&gt;W18&lt;/text&gt;&lt;rect x='0' y='280' width='1152' height='38' rx='7' fill='#FFFFFF' /&gt;&lt;text x='16' y='305' fontSize='15' fontWeight='bold' fill='#1F5FA8' fontFamily='Microsoft YaHei'&gt;第 81 节&lt;/text&gt;&lt;text x='96' y='305' fontSize='15' fill='#16232E' fontFamily='Microsoft YaHei'&gt;★ 校正绘图、刻度与颜色映射&lt;/text&gt;&lt;text x='1080' y='305' fontSize='13' fill='#5A6B7A' textAnchor='end' fontFamily='Microsoft YaHei'&gt;W18&lt;/text&gt;&lt;rect x='0' y='322' width='1152' height='38' rx='7' fill='#F2F7FD' /&gt;&lt;text x='16' y='347' fontSize='15' fontWeight='bold' fill='#1F5FA8' fontFamily='Microsoft YaHei'&gt;第 82 节&lt;/text&gt;&lt;text x='96' y='347' fontSize='15' fill='#16232E' fontFamily='Microsoft YaHei'&gt;随机游走 RandomWalk 类&lt;/text&gt;&lt;text x='1080' y='347' fontSize='13' fill='#5A6B7A' textAnchor='end' fontFamily='Microsoft YaHei'&gt;W18&lt;/text&gt;&lt;rect x='0' y='364' width='1152' height='38' rx='7' fill='#FFFFFF' /&gt;&lt;text x='16' y='389' fontSize='15' fontWeight='bold' fill='#1F5FA8' fontFamily='Microsoft YaHei'&gt;第 83 节&lt;/text&gt;&lt;text x='96' y='389' fontSize='15' fill='#16232E' fontFamily='Microsoft YaHei'&gt;Plotly 掷骰子与动手实战&lt;/text&gt;&lt;text x='1080' y='389' fontSize='13' fill='#5A6B7A' textAnchor='end' fontFamily='Microsoft YaHei'&gt;W18&lt;/text&gt;&#13;&#10;        &lt;/svg&gt;&#13;&#10;    &lt;/Box&gt;&#13;&#10;    &lt;Box style={{ position: 'absolute', left: 64, bottom: 22, width: '1152px', flexDirection: 'row', justifyContent: 'space-between' }}&gt;&#13;&#10;        &lt;Text style={{ fontSize: 13, color: '#8A9AAA' }}&gt;Python 讲授课件 · 逐节版&lt;/Text&gt;&#13;&#10;        &lt;Text style={{ fontSize: 13, color: '#8A9AAA' }}&gt;单元 15 · 封面&lt;/Text&gt;&#13;&#10;    &lt;/Box&gt;&#13;&#10;&lt;/Slide&gt;&#13;&#10;"/>
+        <p:cNvPr id="1" name="" descr="&lt;Slide style={{ width: '1280px', height: '720px', backgroundColor: '#FAFCFE', padding: 0, position: 'relative', overflow: 'hidden' }}&gt;&#13;&#10;    &lt;Box style={{ position: 'absolute', left: 0, top: 0, width: '1280px', height: '150px', background: '#1F5FA8' }} /&gt;&#13;&#10;    &lt;Box style={{ position: 'absolute', left: 64, top: 34, width: '1152px', flexDirection: 'column' }}&gt;&#13;&#10;        &lt;Text style={{ fontSize: 15, fontWeight: 'bold', color: '#BFD9F2', letterSpacing: 2 }}&gt;阶段 2 · 单元 15&lt;/Text&gt;&#13;&#10;        &lt;Text style={{ fontSize: 38, fontWeight: 'bold', color: '#FFFFFF', marginTop: 6 }}&gt;Matplotlib 生成数据&lt;/Text&gt;&#13;&#10;    &lt;/Box&gt;&#13;&#10;    &lt;Box style={{ position: 'absolute', left: 64, top: 168, width: '1152px', height: 470 }}&gt;&#13;&#10;        &lt;svg width='1152' height='470' viewBox='0 0 1152 470'&gt;&#13;&#10;            &lt;text x='0' y='18' fontSize='15' fontWeight='bold' fill='#16232E' fontFamily='Microsoft YaHei'&gt;本单元共 5 节课&lt;/text&gt;&#13;&#10;            &lt;rect x='0' y='56.0' width='1152' height='48.0' rx='7' fill='#FFFFFF' /&gt;&lt;text x='16' y='85.0' fontSize='15' fontWeight='bold' fill='#1F5FA8' fontFamily='Microsoft YaHei'&gt;第 79 节&lt;/text&gt;&lt;text x='96' y='85.0' fontSize='15' fill='#16232E' fontFamily='Microsoft YaHei'&gt;Matplotlib 入门与折线图&lt;/text&gt;&lt;text x='1080' y='85.0' fontSize='13' fill='#5A6B7A' textAnchor='end' fontFamily='Microsoft YaHei'&gt;W18&lt;/text&gt;&lt;rect x='0' y='135.2' width='1152' height='48.0' rx='7' fill='#F2F7FD' /&gt;&lt;text x='16' y='164.2' fontSize='15' fontWeight='bold' fill='#1F5FA8' fontFamily='Microsoft YaHei'&gt;第 80 节&lt;/text&gt;&lt;text x='96' y='164.2' fontSize='15' fill='#16232E' fontFamily='Microsoft YaHei'&gt;散点图与自动计算数据&lt;/text&gt;&lt;text x='1080' y='164.2' fontSize='13' fill='#5A6B7A' textAnchor='end' fontFamily='Microsoft YaHei'&gt;W18&lt;/text&gt;&lt;rect x='0' y='214.4' width='1152' height='48.0' rx='7' fill='#FFFFFF' /&gt;&lt;text x='16' y='243.4' fontSize='15' fontWeight='bold' fill='#1F5FA8' fontFamily='Microsoft YaHei'&gt;第 81 节&lt;/text&gt;&lt;text x='96' y='243.4' fontSize='15' fill='#16232E' fontFamily='Microsoft YaHei'&gt;★ 校正绘图、刻度与颜色映射&lt;/text&gt;&lt;text x='1080' y='243.4' fontSize='13' fill='#5A6B7A' textAnchor='end' fontFamily='Microsoft YaHei'&gt;W18&lt;/text&gt;&lt;rect x='0' y='293.6' width='1152' height='48.0' rx='7' fill='#F2F7FD' /&gt;&lt;text x='16' y='322.6' fontSize='15' fontWeight='bold' fill='#1F5FA8' fontFamily='Microsoft YaHei'&gt;第 82 节&lt;/text&gt;&lt;text x='96' y='322.6' fontSize='15' fill='#16232E' fontFamily='Microsoft YaHei'&gt;随机游走 RandomWalk 类&lt;/text&gt;&lt;text x='1080' y='322.6' fontSize='13' fill='#5A6B7A' textAnchor='end' fontFamily='Microsoft YaHei'&gt;W18&lt;/text&gt;&lt;rect x='0' y='372.8' width='1152' height='48.0' rx='7' fill='#FFFFFF' /&gt;&lt;text x='16' y='401.8' fontSize='15' fontWeight='bold' fill='#1F5FA8' fontFamily='Microsoft YaHei'&gt;第 83 节&lt;/text&gt;&lt;text x='96' y='401.8' fontSize='15' fill='#16232E' fontFamily='Microsoft YaHei'&gt;Plotly 掷骰子与动手实战&lt;/text&gt;&lt;text x='1080' y='401.8' fontSize='13' fill='#5A6B7A' textAnchor='end' fontFamily='Microsoft YaHei'&gt;W18&lt;/text&gt;&#13;&#10;        &lt;/svg&gt;&#13;&#10;    &lt;/Box&gt;&#13;&#10;    &lt;Box style={{ position: 'absolute', left: 64, bottom: 22, width: '1152px', flexDirection: 'row', justifyContent: 'space-between' }}&gt;&#13;&#10;        &lt;Text style={{ fontSize: 13, color: '#8A9AAA' }}&gt;Python 讲授课件 · 逐节版&lt;/Text&gt;&#13;&#10;        &lt;Text style={{ fontSize: 13, color: '#8A9AAA' }}&gt;单元 15 · 封面&lt;/Text&gt;&#13;&#10;    &lt;/Box&gt;&#13;&#10;&lt;/Slide&gt;&#13;&#10;"/>
         <p:cNvGrpSpPr/>
         <p:nvPr/>
       </p:nvGrpSpPr>
@@ -3297,7 +1089,7 @@
   <p:cSld>
     <p:spTree>
       <p:nvGrpSpPr>
-        <p:cNvPr id="15" name="" descr="&lt;Slide style={{ width: '1280px', height: '720px', backgroundColor: '#FAFCFE', padding: 0, position: 'relative', overflow: 'hidden' }}&gt;&#13;&#10;    &lt;Box style={{ position: 'absolute', left: 64, top: 36, width: '1152px', flexDirection: 'row', alignItems: 'center', gap: 12 }}&gt;&#13;&#10;        &lt;Box style={{ background: '#0E9B78', borderRadius: 5, padding: '3px 11px' }}&gt;&#13;&#10;            &lt;Text style={{ fontSize: 14, fontWeight: 'bold', color: '#FFFFFF' }}&gt;第 83 节&lt;/Text&gt;&#13;&#10;        &lt;/Box&gt;&#13;&#10;        &lt;Text style={{ fontSize: 30, fontWeight: 'bold', color: '#16232E' }}&gt;核心知识点&lt;/Text&gt;&#13;&#10;        &lt;Text style={{ fontSize: 15, color: '#5A6B7A', marginTop: 10 }}&gt;· Plotly 掷骰子与动手实战&lt;/Text&gt;&#13;&#10;    &lt;/Box&gt;&#13;&#10;    &lt;Box style={{ position: 'absolute', left: 0, top: 0, width: '1280px', height: '720px' }}&gt;&#13;&#10;        &lt;svg width='1280' height='720' viewBox='0 0 1280 720'&gt;&#13;&#10;            &lt;rect x='64' y='96' width='368' height='330' rx='12' fill='#FFFFFF' stroke='#D8E3EE' /&gt;&lt;rect x='64' y='96' width='368' height='4' rx='2' fill='#1F5FA8' /&gt;&lt;text x='82' y='130' fontSize='15.5' fontWeight='bold' fill='#1F5FA8' textAnchor='start' fontFamily='Microsoft YaHei'&gt;基础档&lt;/text&gt;&lt;text x='82' y='169.0' fontSize='13' fill='#3A4A58' textAnchor='start' fontFamily='Microsoft YaHei'&gt;· 练习 15-1【折线图三连】&lt;/text&gt;&lt;text x='82' y='197.5' fontSize='13' fill='#3A4A58' textAnchor='start' fontFamily='Microsoft YaHei'&gt;· 练习 15-2【散点三件套】&lt;/text&gt;&lt;text x='82' y='226.0' fontSize='13' fill='#3A4A58' textAnchor='start' fontFamily='Microsoft YaHei'&gt;· 练习 15-3【校正绘图演练】&lt;/text&gt;&lt;rect x='468' y='96' width='368' height='330' rx='12' fill='#FFFFFF' stroke='#D8E3EE' /&gt;&lt;rect x='468' y='96' width='368' height='4' rx='2' fill='#1F5FA8' /&gt;&lt;text x='486' y='130' fontSize='15.5' fontWeight='bold' fill='#1F5FA8' textAnchor='start' fontFamily='Microsoft YaHei'&gt;进阶档&lt;/text&gt;&lt;text x='486' y='169.0' fontSize='13' fill='#3A4A58' textAnchor='start' fontFamily='Microsoft YaHei'&gt;· 练习 15-4【可复现的随机游走】&lt;/text&gt;&lt;text x='486' y='197.5' fontSize='13' fill='#3A4A58' textAnchor='start' fontFamily='Microsoft YaHei'&gt;· 练习 15-5【多系列随机游走对照】&lt;/text&gt;&lt;text x='486' y='226.0' fontSize='13' fill='#3A4A58' textAnchor='start' fontFamily='Microsoft YaHei'&gt;· 练习 15-6【骰子实验台】&lt;/text&gt;&lt;rect x='872' y='96' width='368' height='330' rx='12' fill='#FFFFFF' stroke='#D8E3EE' /&gt;&lt;rect x='872' y='96' width='368' height='4' rx='2' fill='#1F5FA8' /&gt;&lt;text x='890' y='130' fontSize='15.5' fontWeight='bold' fill='#1F5FA8' textAnchor='start' fontFamily='Microsoft YaHei'&gt;参考答案 15-1&lt;/text&gt;&lt;text x='890' y='169.0' fontSize='13' fill='#3A4A58' textAnchor='start' fontFamily='Microsoft YaHei'&gt;· import matplotlib.pyplot as plt&lt;/text&gt;&lt;rect x='64' y='574' width='1152' height='66' rx='12' fill='#EEF5FB' /&gt;&lt;text x='84' y='616' fontSize='14' fill='#243444' textAnchor='start' fontFamily='Microsoft YaHei'&gt;看不懂的地方先回讲义对应小节读一遍，再回来对着这页复述一次——能讲出来才算真懂。&lt;/text&gt;&#13;&#10;            &lt;text x='64' y='684' fontSize='13' fill='#8A9AAA' fontFamily='Microsoft YaHei'&gt;Python 讲授课件 · 逐节版&lt;/text&gt;&#13;&#10;            &lt;text x='1216' y='684' fontSize='13' fill='#8A9AAA' textAnchor='end' fontFamily='Microsoft YaHei'&gt;单元 15 · 第 83 节&lt;/text&gt;&#13;&#10;        &lt;/svg&gt;&#13;&#10;    &lt;/Box&gt;&#13;&#10;&lt;/Slide&gt;&#13;&#10;"/>
+        <p:cNvPr id="15" name="" descr="&lt;Slide style={{ width: '1280px', height: '720px', backgroundColor: '#FAFCFE', padding: 0, position: 'relative', overflow: 'hidden' }}&gt;&#13;&#10;    &lt;Box style={{ position: 'absolute', left: 64, top: 36, width: '1152px', flexDirection: 'row', alignItems: 'center', gap: 12 }}&gt;&#13;&#10;        &lt;Box style={{ background: '#0E9B78', borderRadius: 5, padding: '3px 11px' }}&gt;&#13;&#10;            &lt;Text style={{ fontSize: 14, fontWeight: 'bold', color: '#FFFFFF' }}&gt;第 83 节&lt;/Text&gt;&#13;&#10;        &lt;/Box&gt;&#13;&#10;        &lt;Text style={{ fontSize: 30, fontWeight: 'bold', color: '#16232E' }}&gt;核心知识点&lt;/Text&gt;&#13;&#10;        &lt;Text style={{ fontSize: 15, color: '#5A6B7A', marginTop: 10 }}&gt;· Plotly 掷骰子与动手实战&lt;/Text&gt;&#13;&#10;    &lt;/Box&gt;&#13;&#10;    &lt;Box style={{ position: 'absolute', left: 0, top: 0, width: '1280px', height: '720px' }}&gt;&#13;&#10;        &lt;svg width='1280' height='720' viewBox='0 0 1280 720'&gt;&#13;&#10;            &lt;rect x='64' y='96' width='368' height='330' rx='12' fill='#FFFFFF' stroke='#D8E3EE' /&gt;&lt;rect x='64' y='96' width='368' height='4' rx='2' fill='#1F5FA8' /&gt;&lt;text x='82' y='130' fontSize='15.5' fontWeight='bold' fill='#1F5FA8' textAnchor='start' fontFamily='Microsoft YaHei'&gt;基础档&lt;/text&gt;&lt;text x='82' y='169.0' fontSize='13' fill='#3A4A58' textAnchor='start' fontFamily='Microsoft YaHei'&gt;· 练习 15-1【折线图三连】&lt;/text&gt;&lt;text x='82' y='197.5' fontSize='13' fill='#3A4A58' textAnchor='start' fontFamily='Microsoft YaHei'&gt;· 练习 15-2【散点三件套】&lt;/text&gt;&lt;text x='82' y='226.0' fontSize='13' fill='#3A4A58' textAnchor='start' fontFamily='Microsoft YaHei'&gt;· 练习 15-3【校正绘图演练】&lt;/text&gt;&lt;rect x='468' y='96' width='368' height='330' rx='12' fill='#FFFFFF' stroke='#D8E3EE' /&gt;&lt;rect x='468' y='96' width='368' height='4' rx='2' fill='#1F5FA8' /&gt;&lt;text x='486' y='130' fontSize='15.5' fontWeight='bold' fill='#1F5FA8' textAnchor='start' fontFamily='Microsoft YaHei'&gt;进阶档&lt;/text&gt;&lt;text x='486' y='169.0' fontSize='13' fill='#3A4A58' textAnchor='start' fontFamily='Microsoft YaHei'&gt;· 练习 15-4【可复现的随机游走】&lt;/text&gt;&lt;text x='486' y='197.5' fontSize='13' fill='#3A4A58' textAnchor='start' fontFamily='Microsoft YaHei'&gt;· 练习 15-5【多系列随机游走对照】&lt;/text&gt;&lt;text x='486' y='226.0' fontSize='13' fill='#3A4A58' textAnchor='start' fontFamily='Microsoft YaHei'&gt;· 练习 15-6【骰子实验台】&lt;/text&gt;&lt;rect x='872' y='96' width='368' height='330' rx='12' fill='#FFFFFF' stroke='#D8E3EE' /&gt;&lt;rect x='872' y='96' width='368' height='4' rx='2' fill='#1F5FA8' /&gt;&lt;text x='890' y='130' fontSize='15.5' fontWeight='bold' fill='#1F5FA8' textAnchor='start' fontFamily='Microsoft YaHei'&gt;错误 1：★ 忘记校正绘图，点被边框切掉&lt;/text&gt;&lt;text x='890' y='169.0' fontSize='13' fill='#3A4A58' textAnchor='start' fontFamily='Microsoft YaHei'&gt;· 数据范围正好等于坐标轴范围时，&lt;/text&gt;&lt;text x='890' y='188.5' fontSize='13' fill='#3A4A58' textAnchor='start' fontFamily='Microsoft YaHei'&gt;最边缘的点被裁掉一半，像「数据少了两头」。&lt;/text&gt;&lt;rect x='64' y='574' width='1152' height='66' rx='12' fill='#EEF5FB' /&gt;&lt;text x='84' y='616' fontSize='14' fill='#243444' textAnchor='start' fontFamily='Microsoft YaHei'&gt;看不懂的地方先回讲义对应小节读一遍，再回来对着这页复述一次——能讲出来才算真懂。&lt;/text&gt;&#13;&#10;            &lt;text x='64' y='684' fontSize='13' fill='#8A9AAA' fontFamily='Microsoft YaHei'&gt;Python 讲授课件 · 逐节版&lt;/text&gt;&#13;&#10;            &lt;text x='1216' y='684' fontSize='13' fill='#8A9AAA' textAnchor='end' fontFamily='Microsoft YaHei'&gt;单元 15 · 第 83 节&lt;/text&gt;&#13;&#10;        &lt;/svg&gt;&#13;&#10;    &lt;/Box&gt;&#13;&#10;&lt;/Slide&gt;&#13;&#10;"/>
         <p:cNvGrpSpPr/>
         <p:nvPr/>
       </p:nvGrpSpPr>
@@ -4338,7 +2130,7 @@
   <p:cSld>
     <p:spTree>
       <p:nvGrpSpPr>
-        <p:cNvPr id="42" name="" descr="&lt;Slide style={{ width: '1280px', height: '720px', backgroundColor: '#FAFCFE', padding: 0, position: 'relative', overflow: 'hidden' }}&gt;&#13;&#10;    &lt;Box style={{ position: 'absolute', left: 64, top: 36, width: '1152px', flexDirection: 'row', alignItems: 'center', gap: 12 }}&gt;&#13;&#10;        &lt;Box style={{ background: '#0E9B78', borderRadius: 5, padding: '3px 11px' }}&gt;&#13;&#10;            &lt;Text style={{ fontSize: 14, fontWeight: 'bold', color: '#FFFFFF' }}&gt;第 79 节&lt;/Text&gt;&#13;&#10;        &lt;/Box&gt;&#13;&#10;        &lt;Text style={{ fontSize: 30, fontWeight: 'bold', color: '#16232E' }}&gt;核心知识点&lt;/Text&gt;&#13;&#10;        &lt;Text style={{ fontSize: 15, color: '#5A6B7A', marginTop: 10 }}&gt;· Matplotlib 入门与折线图&lt;/Text&gt;&#13;&#10;    &lt;/Box&gt;&#13;&#10;    &lt;Box style={{ position: 'absolute', left: 0, top: 0, width: '1280px', height: '720px' }}&gt;&#13;&#10;        &lt;svg width='1280' height='720' viewBox='0 0 1280 720'&gt;&#13;&#10;            &lt;rect x='64' y='96' width='548' height='330' rx='12' fill='#FFFFFF' stroke='#D8E3EE' /&gt;&lt;rect x='64' y='96' width='548' height='4' rx='2' fill='#1F5FA8' /&gt;&lt;text x='82' y='130' fontSize='15.5' fontWeight='bold' fill='#1F5FA8' textAnchor='start' fontFamily='Microsoft YaHei'&gt;2.1 选型：静态图还是交互图&lt;/text&gt;&lt;text x='82' y='169.0' fontSize='13' fill='#3A4A58' textAnchor='start' fontFamily='Microsoft YaHei'&gt;· ★ 无图形界面的环境怎么办。 服务器、WSL、某些 IDE 里没屏幕，plt.show() 会报&lt;/text&gt;&lt;text x='82' y='188.5' fontSize='13' fill='#3A4A58' textAnchor='start' fontFamily='Microsoft YaHei'&gt; Us…&lt;/text&gt;&lt;rect x='668' y='96' width='548' height='330' rx='12' fill='#FFFFFF' stroke='#D8E3EE' /&gt;&lt;rect x='668' y='96' width='548' height='4' rx='2' fill='#1F5FA8' /&gt;&lt;text x='686' y='130' fontSize='15.5' fontWeight='bold' fill='#1F5FA8' textAnchor='start' fontFamily='Microsoft YaHei'&gt;2.2 面向对象：fig, ax = plt.subplo…&lt;/text&gt;&lt;text x='686' y='169.0' fontSize='13' fill='#3A4A58' textAnchor='start' fontFamily='Microsoft YaHei'&gt;· 教材先带你写「过程式」老写法：plt.plot(input_values, output_values…&lt;/text&gt;&lt;rect x='64' y='574' width='1152' height='66' rx='12' fill='#EEF5FB' /&gt;&lt;text x='84' y='616' fontSize='14' fill='#243444' textAnchor='start' fontFamily='Microsoft YaHei'&gt;看不懂的地方先回讲义对应小节读一遍，再回来对着这页复述一次——能讲出来才算真懂。&lt;/text&gt;&#13;&#10;            &lt;text x='64' y='684' fontSize='13' fill='#8A9AAA' fontFamily='Microsoft YaHei'&gt;Python 讲授课件 · 逐节版&lt;/text&gt;&#13;&#10;            &lt;text x='1216' y='684' fontSize='13' fill='#8A9AAA' textAnchor='end' fontFamily='Microsoft YaHei'&gt;单元 15 · 第 79 节&lt;/text&gt;&#13;&#10;        &lt;/svg&gt;&#13;&#10;    &lt;/Box&gt;&#13;&#10;&lt;/Slide&gt;&#13;&#10;"/>
+        <p:cNvPr id="42" name="" descr="&lt;Slide style={{ width: '1280px', height: '720px', backgroundColor: '#FAFCFE', padding: 0, position: 'relative', overflow: 'hidden' }}&gt;&#13;&#10;    &lt;Box style={{ position: 'absolute', left: 64, top: 36, width: '1152px', flexDirection: 'row', alignItems: 'center', gap: 12 }}&gt;&#13;&#10;        &lt;Box style={{ background: '#0E9B78', borderRadius: 5, padding: '3px 11px' }}&gt;&#13;&#10;            &lt;Text style={{ fontSize: 14, fontWeight: 'bold', color: '#FFFFFF' }}&gt;第 79 节&lt;/Text&gt;&#13;&#10;        &lt;/Box&gt;&#13;&#10;        &lt;Text style={{ fontSize: 30, fontWeight: 'bold', color: '#16232E' }}&gt;核心知识点&lt;/Text&gt;&#13;&#10;        &lt;Text style={{ fontSize: 15, color: '#5A6B7A', marginTop: 10 }}&gt;· Matplotlib 入门与折线图&lt;/Text&gt;&#13;&#10;    &lt;/Box&gt;&#13;&#10;    &lt;Box style={{ position: 'absolute', left: 0, top: 0, width: '1280px', height: '720px' }}&gt;&#13;&#10;        &lt;svg width='1280' height='720' viewBox='0 0 1280 720'&gt;&#13;&#10;            &lt;rect x='64' y='96' width='548' height='330' rx='12' fill='#FFFFFF' stroke='#D8E3EE' /&gt;&lt;rect x='64' y='96' width='548' height='4' rx='2' fill='#1F5FA8' /&gt;&lt;text x='82' y='130' fontSize='15.5' fontWeight='bold' fill='#1F5FA8' textAnchor='start' fontFamily='Microsoft YaHei'&gt;2.1 选型：静态图还是交互图&lt;/text&gt;&lt;text x='82' y='169.0' fontSize='13' fill='#3A4A58' textAnchor='start' fontFamily='Microsoft YaHei'&gt;· ★ 无图形界面的环境怎么办。&lt;/text&gt;&lt;rect x='668' y='96' width='548' height='330' rx='12' fill='#FFFFFF' stroke='#D8E3EE' /&gt;&lt;rect x='668' y='96' width='548' height='4' rx='2' fill='#1F5FA8' /&gt;&lt;text x='686' y='130' fontSize='15.5' fontWeight='bold' fill='#1F5FA8' textAnchor='start' fontFamily='Microsoft YaHei'&gt;2.2 面向对象：fig, ax = plt.subplo…&lt;/text&gt;&lt;text x='686' y='169.0' fontSize='13' fill='#3A4A58' textAnchor='start' fontFamily='Microsoft YaHei'&gt;· fig 是画板，ax 是画板上贴好的一张白纸。&lt;/text&gt;&lt;text x='686' y='197.5' fontSize='13' fill='#3A4A58' textAnchor='start' fontFamily='Microsoft YaHei'&gt;· 中间的逗号叫解包：函数返回元组 (figure, axes)，一句话拆成两个变量。&lt;/text&gt;&lt;rect x='64' y='574' width='1152' height='66' rx='12' fill='#EEF5FB' /&gt;&lt;text x='84' y='616' fontSize='14' fill='#243444' textAnchor='start' fontFamily='Microsoft YaHei'&gt;看不懂的地方先回讲义对应小节读一遍，再回来对着这页复述一次——能讲出来才算真懂。&lt;/text&gt;&#13;&#10;            &lt;text x='64' y='684' fontSize='13' fill='#8A9AAA' fontFamily='Microsoft YaHei'&gt;Python 讲授课件 · 逐节版&lt;/text&gt;&#13;&#10;            &lt;text x='1216' y='684' fontSize='13' fill='#8A9AAA' textAnchor='end' fontFamily='Microsoft YaHei'&gt;单元 15 · 第 79 节&lt;/text&gt;&#13;&#10;        &lt;/svg&gt;&#13;&#10;    &lt;/Box&gt;&#13;&#10;&lt;/Slide&gt;&#13;&#10;"/>
         <p:cNvGrpSpPr/>
         <p:nvPr/>
       </p:nvGrpSpPr>
@@ -4769,7 +2561,7 @@
   <p:cSld>
     <p:spTree>
       <p:nvGrpSpPr>
-        <p:cNvPr id="55" name="" descr="&lt;Slide style={{ width: '1280px', height: '720px', backgroundColor: '#FAFCFE', padding: 0, position: 'relative', overflow: 'hidden' }}&gt;&#13;&#10;    &lt;Box style={{ position: 'absolute', left: 64, top: 36, width: '1152px', flexDirection: 'row', alignItems: 'center', gap: 12 }}&gt;&#13;&#10;        &lt;Box style={{ background: '#0E9B78', borderRadius: 5, padding: '3px 11px' }}&gt;&#13;&#10;            &lt;Text style={{ fontSize: 14, fontWeight: 'bold', color: '#FFFFFF' }}&gt;第 80 节&lt;/Text&gt;&#13;&#10;        &lt;/Box&gt;&#13;&#10;        &lt;Text style={{ fontSize: 30, fontWeight: 'bold', color: '#16232E' }}&gt;核心知识点&lt;/Text&gt;&#13;&#10;        &lt;Text style={{ fontSize: 15, color: '#5A6B7A', marginTop: 10 }}&gt;· 散点图与自动计算数据&lt;/Text&gt;&#13;&#10;    &lt;/Box&gt;&#13;&#10;    &lt;Box style={{ position: 'absolute', left: 0, top: 0, width: '1280px', height: '720px' }}&gt;&#13;&#10;        &lt;svg width='1280' height='720' viewBox='0 0 1280 720'&gt;&#13;&#10;            &lt;rect x='64' y='96' width='548' height='330' rx='12' fill='#FFFFFF' stroke='#D8E3EE' /&gt;&lt;rect x='64' y='96' width='548' height='4' rx='2' fill='#1F5FA8' /&gt;&lt;text x='82' y='130' fontSize='15.5' fontWeight='bold' fill='#1F5FA8' textAnchor='start' fontFamily='Microsoft YaHei'&gt;2.3 折线图细节：线宽、标签、样式&lt;/text&gt;&lt;text x='82' y='169.0' fontSize='13' fill='#3A4A58' textAnchor='start' fontFamily='Microsoft YaHei'&gt;· 内置样式一行换肤：先 print(plt.style.available) 看有哪些，再 plt.st…&lt;/text&gt;&lt;text x='82' y='197.5' fontSize='13' fill='#3A4A58' textAnchor='start' fontFamily='Microsoft YaHei'&gt;· ★ figsize 与 dpi：清晰度靠 dpi，物理尺寸靠 figsize（英寸）。想插一张不糊的&lt;/text&gt;&lt;text x='82' y='217.0' fontSize='13' fill='#3A4A58' textAnchor='start' fontFamily='Microsoft YaHei'&gt;图…&lt;/text&gt;&lt;rect x='668' y='96' width='548' height='330' rx='12' fill='#FFFFFF' stroke='#D8E3EE' /&gt;&lt;rect x='668' y='96' width='548' height='4' rx='2' fill='#1F5FA8' /&gt;&lt;text x='686' y='130' fontSize='15.5' fontWeight='bold' fill='#1F5FA8' textAnchor='start' fontFamily='Microsoft YaHei'&gt;2.4 散点图三件套：s=、c=、cmap=&lt;/text&gt;&lt;text x='686' y='169.0' fontSize='13' fill='#3A4A58' textAnchor='start' fontFamily='Microsoft YaHei'&gt;· s=（size）控制面积，单位是「点」。教材里 s=x_values 2 就是为了看得清。&lt;/text&gt;&lt;text x='686' y='197.5' fontSize='13' fill='#3A4A58' textAnchor='start' fontFamily='Microsoft YaHei'&gt;· c=（color）可以传颜色名字（分类），也可以传数值（必须配 cmap=）。&lt;/text&gt;&lt;text x='686' y='226.0' fontSize='13' fill='#3A4A58' textAnchor='start' fontFamily='Microsoft YaHei'&gt;· cmap=（color map）规定「数值怎么翻译成颜色」，最常用 plt.cm.Blues——值小则&lt;/text&gt;&lt;text x='686' y='245.5' fontSize='13' fill='#3A4A58' textAnchor='start' fontFamily='Microsoft YaHei'&gt;…&lt;/text&gt;&lt;rect x='64' y='574' width='1152' height='66' rx='12' fill='#EEF5FB' /&gt;&lt;text x='84' y='616' fontSize='14' fill='#243444' textAnchor='start' fontFamily='Microsoft YaHei'&gt;看不懂的地方先回讲义对应小节读一遍，再回来对着这页复述一次——能讲出来才算真懂。&lt;/text&gt;&#13;&#10;            &lt;text x='64' y='684' fontSize='13' fill='#8A9AAA' fontFamily='Microsoft YaHei'&gt;Python 讲授课件 · 逐节版&lt;/text&gt;&#13;&#10;            &lt;text x='1216' y='684' fontSize='13' fill='#8A9AAA' textAnchor='end' fontFamily='Microsoft YaHei'&gt;单元 15 · 第 80 节&lt;/text&gt;&#13;&#10;        &lt;/svg&gt;&#13;&#10;    &lt;/Box&gt;&#13;&#10;&lt;/Slide&gt;&#13;&#10;"/>
+        <p:cNvPr id="55" name="" descr="&lt;Slide style={{ width: '1280px', height: '720px', backgroundColor: '#FAFCFE', padding: 0, position: 'relative', overflow: 'hidden' }}&gt;&#13;&#10;    &lt;Box style={{ position: 'absolute', left: 64, top: 36, width: '1152px', flexDirection: 'row', alignItems: 'center', gap: 12 }}&gt;&#13;&#10;        &lt;Box style={{ background: '#0E9B78', borderRadius: 5, padding: '3px 11px' }}&gt;&#13;&#10;            &lt;Text style={{ fontSize: 14, fontWeight: 'bold', color: '#FFFFFF' }}&gt;第 80 节&lt;/Text&gt;&#13;&#10;        &lt;/Box&gt;&#13;&#10;        &lt;Text style={{ fontSize: 30, fontWeight: 'bold', color: '#16232E' }}&gt;核心知识点&lt;/Text&gt;&#13;&#10;        &lt;Text style={{ fontSize: 15, color: '#5A6B7A', marginTop: 10 }}&gt;· 散点图与自动计算数据&lt;/Text&gt;&#13;&#10;    &lt;/Box&gt;&#13;&#10;    &lt;Box style={{ position: 'absolute', left: 0, top: 0, width: '1280px', height: '720px' }}&gt;&#13;&#10;        &lt;svg width='1280' height='720' viewBox='0 0 1280 720'&gt;&#13;&#10;            &lt;rect x='64' y='96' width='548' height='330' rx='12' fill='#FFFFFF' stroke='#D8E3EE' /&gt;&lt;rect x='64' y='96' width='548' height='4' rx='2' fill='#1F5FA8' /&gt;&lt;text x='82' y='130' fontSize='15.5' fontWeight='bold' fill='#1F5FA8' textAnchor='start' fontFamily='Microsoft YaHei'&gt;2.3 折线图细节：线宽、标签、样式&lt;/text&gt;&lt;text x='82' y='169.0' fontSize='13' fill='#3A4A58' textAnchor='start' fontFamily='Microsoft YaHei'&gt;· 内置样式&lt;/text&gt;&lt;text x='82' y='197.5' fontSize='13' fill='#3A4A58' textAnchor='start' fontFamily='Microsoft YaHei'&gt;· ★ figsize 与 dpi&lt;/text&gt;&lt;rect x='668' y='96' width='548' height='330' rx='12' fill='#FFFFFF' stroke='#D8E3EE' /&gt;&lt;rect x='668' y='96' width='548' height='4' rx='2' fill='#1F5FA8' /&gt;&lt;text x='686' y='130' fontSize='15.5' fontWeight='bold' fill='#1F5FA8' textAnchor='start' fontFamily='Microsoft YaHei'&gt;2.4 散点图三件套：s=、c=、cmap=&lt;/text&gt;&lt;text x='686' y='169.0' fontSize='13' fill='#3A4A58' textAnchor='start' fontFamily='Microsoft YaHei'&gt;· s=（size）控制面积，单位是「点」。教材里 s=x_values 2 就是为了看得清。&lt;/text&gt;&lt;text x='686' y='197.5' fontSize='13' fill='#3A4A58' textAnchor='start' fontFamily='Microsoft YaHei'&gt;· c=（color）可以传颜色名字（分类），也可以传数值（必须配 cmap=）。&lt;/text&gt;&lt;text x='686' y='226.0' fontSize='13' fill='#3A4A58' textAnchor='start' fontFamily='Microsoft YaHei'&gt;· cmap=（color map）规定「数值怎么翻译成颜色」…&lt;/text&gt;&lt;rect x='64' y='574' width='1152' height='66' rx='12' fill='#EEF5FB' /&gt;&lt;text x='84' y='616' fontSize='14' fill='#243444' textAnchor='start' fontFamily='Microsoft YaHei'&gt;看不懂的地方先回讲义对应小节读一遍，再回来对着这页复述一次——能讲出来才算真懂。&lt;/text&gt;&#13;&#10;            &lt;text x='64' y='684' fontSize='13' fill='#8A9AAA' fontFamily='Microsoft YaHei'&gt;Python 讲授课件 · 逐节版&lt;/text&gt;&#13;&#10;            &lt;text x='1216' y='684' fontSize='13' fill='#8A9AAA' textAnchor='end' fontFamily='Microsoft YaHei'&gt;单元 15 · 第 80 节&lt;/text&gt;&#13;&#10;        &lt;/svg&gt;&#13;&#10;    &lt;/Box&gt;&#13;&#10;&lt;/Slide&gt;&#13;&#10;"/>
         <p:cNvGrpSpPr/>
         <p:nvPr/>
       </p:nvGrpSpPr>
@@ -5210,7 +3002,7 @@
   <p:cSld>
     <p:spTree>
       <p:nvGrpSpPr>
-        <p:cNvPr id="68" name="" descr="&lt;Slide style={{ width: '1280px', height: '720px', backgroundColor: '#FAFCFE', padding: 0, position: 'relative', overflow: 'hidden' }}&gt;&#13;&#10;    &lt;Box style={{ position: 'absolute', left: 64, top: 36, width: '1152px', flexDirection: 'row', alignItems: 'center', gap: 12 }}&gt;&#13;&#10;        &lt;Box style={{ background: '#0E9B78', borderRadius: 5, padding: '3px 11px' }}&gt;&#13;&#10;            &lt;Text style={{ fontSize: 14, fontWeight: 'bold', color: '#FFFFFF' }}&gt;第 81 节&lt;/Text&gt;&#13;&#10;        &lt;/Box&gt;&#13;&#10;        &lt;Text style={{ fontSize: 30, fontWeight: 'bold', color: '#16232E' }}&gt;核心知识点&lt;/Text&gt;&#13;&#10;        &lt;Text style={{ fontSize: 15, color: '#5A6B7A', marginTop: 10 }}&gt;· ★ 校正绘图、刻度与颜色映射&lt;/Text&gt;&#13;&#10;    &lt;/Box&gt;&#13;&#10;    &lt;Box style={{ position: 'absolute', left: 0, top: 0, width: '1280px', height: '720px' }}&gt;&#13;&#10;        &lt;svg width='1280' height='720' viewBox='0 0 1280 720'&gt;&#13;&#10;            &lt;rect x='64' y='96' width='368' height='330' rx='12' fill='#FFFFFF' stroke='#D8E3EE' /&gt;&lt;rect x='64' y='96' width='368' height='4' rx='2' fill='#1F5FA8' /&gt;&lt;text x='82' y='130' fontSize='15.5' fontWeight='bold' fill='#1F5FA8' textAnchor='start' fontFamily='Microsoft YaHei'&gt;2.5 ★ 校正绘图：给坐标轴留边距&lt;/text&gt;&lt;text x='82' y='169.0' fontSize='13' fill='#3A4A58' textAnchor='start' fontFamily='Microsoft YaHei'&gt;· 解决办法是手动指定范围：ax.axis([0, 1100, 0, 1_&lt;/text&gt;&lt;text x='82' y='188.5' fontSize='13' fill='#3A4A58' textAnchor='start' fontFamily='Microsoft YaHei'&gt;100_000])，四个数顺序是…&lt;/text&gt;&lt;text x='82' y='217.0' fontSize='13' fill='#3A4A58' textAnchor='start' fontFamily='Microsoft YaHei'&gt;· 定制刻度标记。 默认刻度由 matplotlib 自选，大数&lt;/text&gt;&lt;text x='82' y='236.5' fontSize='13' fill='#3A4A58' textAnchor='start' fontFamily='Microsoft YaHei'&gt;字上会变成 1.0e6 科学计数法，或标签…&lt;/text&gt;&lt;text x='82' y='265.0' fontSize='13' fill='#3A4A58' textAnchor='start' fontFamily='Microsoft YaHei'&gt;· ★ set_xticks 与 set_xticklabels 必须配套调用。&lt;/text&gt;&lt;text x='82' y='284.5' fontSize='13' fill='#3A4A58' textAnchor='start' fontFamily='Microsoft YaHei'&gt; 只调后者，标签会被硬贴在…&lt;/text&gt;&lt;rect x='468' y='96' width='368' height='330' rx='12' fill='#FFFFFF' stroke='#D8E3EE' /&gt;&lt;rect x='468' y='96' width='368' height='4' rx='2' fill='#1F5FA8' /&gt;&lt;text x='486' y='130' fontSize='15.5' fontWeight='bold' fill='#1F5FA8' textAnchor='start' fontFamily='Microsoft YaHei'&gt;2.6 随机游走：RandomWalk 类&lt;/text&gt;&lt;text x='486' y='169.0' fontSize='13' fill='#3A4A58' textAnchor='start' fontFamily='Microsoft YaHei'&gt;· 随机游走是最简单的随机模型：一只小虫每次随机往一个&lt;/text&gt;&lt;text x='486' y='188.5' fontSize='13' fill='#3A4A58' textAnchor='start' fontFamily='Microsoft YaHei'&gt;方向走一步，走一千步得到一条弯曲路径。它是布朗运动&lt;/text&gt;&lt;text x='486' y='208.0' fontSize='13' fill='#3A4A58' textAnchor='start' fontFamily='Microsoft YaHei'&gt;…&lt;/text&gt;&lt;text x='486' y='236.5' fontSize='13' fill='#3A4A58' textAnchor='start' fontFamily='Microsoft YaHei'&gt;· ★ 这里最容易错：为什么要「拒绝原地不动」？ 若允&lt;/text&gt;&lt;text x='486' y='256.0' fontSize='13' fill='#3A4A58' textAnchor='start' fontFamily='Microsoft YaHei'&gt;许 x 和 y 同时不变，这轮什么也没发生。四种组合…&lt;/text&gt;&lt;text x='486' y='284.5' fontSize='13' fill='#3A4A58' textAnchor='start' fontFamily='Microsoft YaHei'&gt;· ★ random.seed(42) 是这一章最有工程价值的一行。 &lt;/text&gt;&lt;text x='486' y='304.0' fontSize='13' fill='#3A4A58' textAnchor='start' fontFamily='Microsoft YaHei'&gt;随机性是编程里的「double 难度…&lt;/text&gt;&lt;rect x='872' y='96' width='368' height='330' rx='12' fill='#FFFFFF' stroke='#D8E3EE' /&gt;&lt;rect x='872' y='96' width='368' height='4' rx='2' fill='#1F5FA8' /&gt;&lt;text x='890' y='130' fontSize='15.5' fontWeight='bold' fill='#1F5FA8' textAnchor='start' fontFamily='Microsoft YaHei'&gt;2.7 Plotly 掷骰子：Die 类&lt;/text&gt;&lt;text x='890' y='169.0' fontSize='13' fill='#3A4A58' textAnchor='start' fontFamily='Microsoft YaHei'&gt;· Die 类的设计：骰子是「能被掷的对象」，该有的是—&lt;/text&gt;&lt;text x='890' y='188.5' fontSize='13' fill='#3A4A58' textAnchor='start' fontFamily='Microsoft YaHei'&gt;—面数（属性）、记住每次结果（属性）、掷一次（方法&lt;/text&gt;&lt;text x='890' y='208.0' fontSize='13' fill='#3A4A58' textAnchor='start' fontFamily='Microsoft YaHei'&gt;…&lt;/text&gt;&lt;text x='890' y='236.5' fontSize='13' fill='#3A4A58' textAnchor='start' fontFamily='Microsoft YaHei'&gt;· ★ results.count(value) 是本节的关键一招。 想知&lt;/text&gt;&lt;text x='890' y='256.0' fontSize='13' fill='#3A4A58' textAnchor='start' fontFamily='Microsoft YaHei'&gt;道「1 点出现了多少次」，最笨是…&lt;/text&gt;&lt;text x='890' y='284.5' fontSize='13' fill='#3A4A58' textAnchor='start' fontFamily='Microsoft YaHei'&gt;· 画分布图。 px.bar() 需要横纵两组数据；定制用 fig&lt;/text&gt;&lt;text x='890' y='304.0' fontSize='13' fill='#3A4A58' textAnchor='start' fontFamily='Microsoft YaHei'&gt;.update_layout()（改整体…&lt;/text&gt;&lt;rect x='64' y='574' width='1152' height='66' rx='12' fill='#EEF5FB' /&gt;&lt;text x='84' y='616' fontSize='14' fill='#243444' textAnchor='start' fontFamily='Microsoft YaHei'&gt;看不懂的地方先回讲义对应小节读一遍，再回来对着这页复述一次——能讲出来才算真懂。&lt;/text&gt;&#13;&#10;            &lt;text x='64' y='684' fontSize='13' fill='#8A9AAA' fontFamily='Microsoft YaHei'&gt;Python 讲授课件 · 逐节版&lt;/text&gt;&#13;&#10;            &lt;text x='1216' y='684' fontSize='13' fill='#8A9AAA' textAnchor='end' fontFamily='Microsoft YaHei'&gt;单元 15 · 第 81 节&lt;/text&gt;&#13;&#10;        &lt;/svg&gt;&#13;&#10;    &lt;/Box&gt;&#13;&#10;&lt;/Slide&gt;&#13;&#10;"/>
+        <p:cNvPr id="68" name="" descr="&lt;Slide style={{ width: '1280px', height: '720px', backgroundColor: '#FAFCFE', padding: 0, position: 'relative', overflow: 'hidden' }}&gt;&#13;&#10;    &lt;Box style={{ position: 'absolute', left: 64, top: 36, width: '1152px', flexDirection: 'row', alignItems: 'center', gap: 12 }}&gt;&#13;&#10;        &lt;Box style={{ background: '#0E9B78', borderRadius: 5, padding: '3px 11px' }}&gt;&#13;&#10;            &lt;Text style={{ fontSize: 14, fontWeight: 'bold', color: '#FFFFFF' }}&gt;第 81 节&lt;/Text&gt;&#13;&#10;        &lt;/Box&gt;&#13;&#10;        &lt;Text style={{ fontSize: 30, fontWeight: 'bold', color: '#16232E' }}&gt;核心知识点&lt;/Text&gt;&#13;&#10;        &lt;Text style={{ fontSize: 15, color: '#5A6B7A', marginTop: 10 }}&gt;· ★ 校正绘图、刻度与颜色映射&lt;/Text&gt;&#13;&#10;    &lt;/Box&gt;&#13;&#10;    &lt;Box style={{ position: 'absolute', left: 0, top: 0, width: '1280px', height: '720px' }}&gt;&#13;&#10;        &lt;svg width='1280' height='720' viewBox='0 0 1280 720'&gt;&#13;&#10;            &lt;rect x='64' y='96' width='368' height='330' rx='12' fill='#FFFFFF' stroke='#D8E3EE' /&gt;&lt;rect x='64' y='96' width='368' height='4' rx='2' fill='#1F5FA8' /&gt;&lt;text x='82' y='130' fontSize='15.5' fontWeight='bold' fill='#1F5FA8' textAnchor='start' fontFamily='Microsoft YaHei'&gt;2.5 ★ 校正绘图：给坐标轴留边距&lt;/text&gt;&lt;text x='82' y='169.0' fontSize='13' fill='#3A4A58' textAnchor='start' fontFamily='Microsoft YaHei'&gt;· 解决办法是手动指定范围&lt;/text&gt;&lt;text x='82' y='197.5' fontSize='13' fill='#3A4A58' textAnchor='start' fontFamily='Microsoft YaHei'&gt;· 定制刻度标记。&lt;/text&gt;&lt;text x='82' y='226.0' fontSize='13' fill='#3A4A58' textAnchor='start' fontFamily='Microsoft YaHei'&gt;· ★ set_xticks 与 set_xticklabels 必须配套调用。&lt;/text&gt;&lt;rect x='468' y='96' width='368' height='330' rx='12' fill='#FFFFFF' stroke='#D8E3EE' /&gt;&lt;rect x='468' y='96' width='368' height='4' rx='2' fill='#1F5FA8' /&gt;&lt;text x='486' y='130' fontSize='15.5' fontWeight='bold' fill='#1F5FA8' textAnchor='start' fontFamily='Microsoft YaHei'&gt;2.6 随机游走：RandomWalk 类&lt;/text&gt;&lt;text x='486' y='169.0' fontSize='13' fill='#3A4A58' textAnchor='start' fontFamily='Microsoft YaHei'&gt;· 随机游走&lt;/text&gt;&lt;text x='486' y='197.5' fontSize='13' fill='#3A4A58' textAnchor='start' fontFamily='Microsoft YaHei'&gt;· ★ 这里最容易错：为什么要「拒绝原地不动」？&lt;/text&gt;&lt;text x='486' y='226.0' fontSize='13' fill='#3A4A58' textAnchor='start' fontFamily='Microsoft YaHei'&gt;· ★ random.seed(42) 是这一章最有工程价值的一行。&lt;/text&gt;&lt;rect x='872' y='96' width='368' height='330' rx='12' fill='#FFFFFF' stroke='#D8E3EE' /&gt;&lt;rect x='872' y='96' width='368' height='4' rx='2' fill='#1F5FA8' /&gt;&lt;text x='890' y='130' fontSize='15.5' fontWeight='bold' fill='#1F5FA8' textAnchor='start' fontFamily='Microsoft YaHei'&gt;2.7 Plotly 掷骰子：Die 类&lt;/text&gt;&lt;text x='890' y='169.0' fontSize='13' fill='#3A4A58' textAnchor='start' fontFamily='Microsoft YaHei'&gt;· Die 类的设计&lt;/text&gt;&lt;text x='890' y='197.5' fontSize='13' fill='#3A4A58' textAnchor='start' fontFamily='Microsoft YaHei'&gt;· ★ results.count(value) 是本节的关键一招。&lt;/text&gt;&lt;text x='890' y='226.0' fontSize='13' fill='#3A4A58' textAnchor='start' fontFamily='Microsoft YaHei'&gt;· 画分布图。&lt;/text&gt;&lt;rect x='64' y='574' width='1152' height='66' rx='12' fill='#EEF5FB' /&gt;&lt;text x='84' y='616' fontSize='14' fill='#243444' textAnchor='start' fontFamily='Microsoft YaHei'&gt;看不懂的地方先回讲义对应小节读一遍，再回来对着这页复述一次——能讲出来才算真懂。&lt;/text&gt;&#13;&#10;            &lt;text x='64' y='684' fontSize='13' fill='#8A9AAA' fontFamily='Microsoft YaHei'&gt;Python 讲授课件 · 逐节版&lt;/text&gt;&#13;&#10;            &lt;text x='1216' y='684' fontSize='13' fill='#8A9AAA' textAnchor='end' fontFamily='Microsoft YaHei'&gt;单元 15 · 第 81 节&lt;/text&gt;&#13;&#10;        &lt;/svg&gt;&#13;&#10;    &lt;/Box&gt;&#13;&#10;&lt;/Slide&gt;&#13;&#10;"/>
         <p:cNvGrpSpPr/>
         <p:nvPr/>
       </p:nvGrpSpPr>

--- a/python-course-ppt/逐节课件/Python讲授课件-单元15.pptx
+++ b/python-course-ppt/逐节课件/Python讲授课件-单元15.pptx
@@ -236,6 +236,1260 @@
     </a:lvl9pPr>
   </p:notesStyle>
 </p:notesMaster>
+</file>
+
+<file path=ppt/notesSlides/notesSlide1.xml><?xml version="1.0" encoding="utf-8"?>
+<p:notes xmlns:a="http://schemas.openxmlformats.org/drawingml/2006/main" xmlns:p="http://schemas.openxmlformats.org/presentationml/2006/main" xmlns:r="http://schemas.openxmlformats.org/officeDocument/2006/relationships">
+  <p:cSld>
+    <p:spTree>
+      <p:nvGrpSpPr>
+        <p:cNvPr id="1" name=""/>
+        <p:cNvGrpSpPr/>
+        <p:nvPr/>
+      </p:nvGrpSpPr>
+      <p:grpSpPr>
+        <a:xfrm>
+          <a:off x="0" y="0"/>
+          <a:ext cx="0" cy="0"/>
+          <a:chOff x="0" y="0"/>
+          <a:chExt cx="0" cy="0"/>
+        </a:xfrm>
+      </p:grpSpPr>
+      <p:sp>
+        <p:nvSpPr>
+          <p:cNvPr id="2" name="讲课提示"/>
+          <p:cNvSpPr txBox="1"/>
+          <p:nvPr/>
+        </p:nvSpPr>
+        <p:spPr>
+          <a:xfrm>
+            <a:off x="457200" y="457200"/>
+            <a:ext cx="6858000" cy="4800600"/>
+          </a:xfrm>
+          <a:prstGeom prst="rect">
+            <a:avLst/>
+          </a:prstGeom>
+        </p:spPr>
+        <p:txBody>
+          <a:bodyPr wrap="square"/>
+          <a:lstStyle/>
+          <a:p>
+            <a:r>
+              <a:rPr lang="zh-CN" dirty="0"/>
+              <a:t>单元 15 · 单元 15 · Matplotlib 生成数据</a:t>
+            </a:r>
+          </a:p>
+          <a:p>
+            <a:r>
+              <a:rPr lang="zh-CN" dirty="0"/>
+              <a:t/>
+            </a:r>
+          </a:p>
+          <a:p>
+            <a:r>
+              <a:rPr lang="zh-CN" dirty="0"/>
+              <a:t>本单元包含以下课节：</a:t>
+            </a:r>
+          </a:p>
+          <a:p>
+            <a:r>
+              <a:rPr lang="zh-CN" dirty="0"/>
+              <a:t>· 第 79 节 Matplotlib 入门与折线图</a:t>
+            </a:r>
+          </a:p>
+          <a:p>
+            <a:r>
+              <a:rPr lang="zh-CN" dirty="0"/>
+              <a:t>· 第 80 节 散点图与自动计算数据</a:t>
+            </a:r>
+          </a:p>
+          <a:p>
+            <a:r>
+              <a:rPr lang="zh-CN" dirty="0"/>
+              <a:t>· 第 81 节 ★ 校正绘图、刻度与颜色映射</a:t>
+            </a:r>
+          </a:p>
+          <a:p>
+            <a:r>
+              <a:rPr lang="zh-CN" dirty="0"/>
+              <a:t>· 第 82 节 随机游走 RandomWalk 类</a:t>
+            </a:r>
+          </a:p>
+          <a:p>
+            <a:r>
+              <a:rPr lang="zh-CN" dirty="0"/>
+              <a:t>· 第 83 节 Plotly 掷骰子与动手实战</a:t>
+            </a:r>
+          </a:p>
+          <a:p>
+            <a:r>
+              <a:rPr lang="zh-CN" dirty="0"/>
+              <a:t/>
+            </a:r>
+          </a:p>
+          <a:p>
+            <a:r>
+              <a:rPr lang="zh-CN" dirty="0"/>
+              <a:t>开场用 3 分钟讲清：这个单元学完能做出什么，最后会被关卡怎么验。</a:t>
+            </a:r>
+          </a:p>
+        </p:txBody>
+      </p:sp>
+    </p:spTree>
+  </p:cSld>
+  <p:clrMapOvr>
+    <a:masterClrMapping/>
+  </p:clrMapOvr>
+</p:notes>
+</file>
+
+<file path=ppt/notesSlides/notesSlide10.xml><?xml version="1.0" encoding="utf-8"?>
+<p:notes xmlns:a="http://schemas.openxmlformats.org/drawingml/2006/main" xmlns:p="http://schemas.openxmlformats.org/presentationml/2006/main" xmlns:r="http://schemas.openxmlformats.org/officeDocument/2006/relationships">
+  <p:cSld>
+    <p:spTree>
+      <p:nvGrpSpPr>
+        <p:cNvPr id="1" name=""/>
+        <p:cNvGrpSpPr/>
+        <p:nvPr/>
+      </p:nvGrpSpPr>
+      <p:grpSpPr>
+        <a:xfrm>
+          <a:off x="0" y="0"/>
+          <a:ext cx="0" cy="0"/>
+          <a:chOff x="0" y="0"/>
+          <a:chExt cx="0" cy="0"/>
+        </a:xfrm>
+      </p:grpSpPr>
+      <p:sp>
+        <p:nvSpPr>
+          <p:cNvPr id="2" name="讲课提示"/>
+          <p:cNvSpPr txBox="1"/>
+          <p:nvPr/>
+        </p:nvSpPr>
+        <p:spPr>
+          <a:xfrm>
+            <a:off x="457200" y="457200"/>
+            <a:ext cx="6858000" cy="4800600"/>
+          </a:xfrm>
+          <a:prstGeom prst="rect">
+            <a:avLst/>
+          </a:prstGeom>
+        </p:spPr>
+        <p:txBody>
+          <a:bodyPr wrap="square"/>
+          <a:lstStyle/>
+          <a:p>
+            <a:r>
+              <a:rPr lang="zh-CN" dirty="0"/>
+              <a:t>第 83 节 · Plotly 掷骰子与动手实战</a:t>
+            </a:r>
+          </a:p>
+          <a:p>
+            <a:r>
+              <a:rPr lang="zh-CN" dirty="0"/>
+              <a:t>单元 15 · Matplotlib 生成数据 · W19</a:t>
+            </a:r>
+          </a:p>
+          <a:p>
+            <a:r>
+              <a:rPr lang="zh-CN" dirty="0"/>
+              <a:t/>
+            </a:r>
+          </a:p>
+          <a:p>
+            <a:r>
+              <a:rPr lang="zh-CN" dirty="0"/>
+              <a:t>学习目标：会用 Plotly 的 Die 类与 px.bar 画直方图；能比较两个骰子的分布</a:t>
+            </a:r>
+          </a:p>
+          <a:p>
+            <a:r>
+              <a:rPr lang="zh-CN" dirty="0"/>
+              <a:t/>
+            </a:r>
+          </a:p>
+          <a:p>
+            <a:r>
+              <a:rPr lang="zh-CN" dirty="0"/>
+              <a:t>课堂实操（40 分钟，不看答案）：</a:t>
+            </a:r>
+          </a:p>
+          <a:p>
+            <a:r>
+              <a:rPr lang="zh-CN" dirty="0"/>
+              <a:t>· 实现 Die 类并掷 1000 次</a:t>
+            </a:r>
+          </a:p>
+          <a:p>
+            <a:r>
+              <a:rPr lang="zh-CN" dirty="0"/>
+              <a:t>· 同时掷两个面数不同的骰子，对比分布</a:t>
+            </a:r>
+          </a:p>
+          <a:p>
+            <a:r>
+              <a:rPr lang="zh-CN" dirty="0"/>
+              <a:t/>
+            </a:r>
+          </a:p>
+          <a:p>
+            <a:r>
+              <a:rPr lang="zh-CN" dirty="0"/>
+              <a:t>课后作业：</a:t>
+            </a:r>
+          </a:p>
+          <a:p>
+            <a:r>
+              <a:rPr lang="zh-CN" dirty="0"/>
+              <a:t>· ★ 产出：掷骰子分布图（可交互 HTML）</a:t>
+            </a:r>
+          </a:p>
+          <a:p>
+            <a:r>
+              <a:rPr lang="zh-CN" dirty="0"/>
+              <a:t/>
+            </a:r>
+          </a:p>
+          <a:p>
+            <a:r>
+              <a:rPr lang="zh-CN" dirty="0"/>
+              <a:t>节奏：讲 20 分钟 → 学员自己敲 40 分钟（不看答案）→ 对讲评自查 20 分钟 → 写作业 10 分钟。</a:t>
+            </a:r>
+          </a:p>
+        </p:txBody>
+      </p:sp>
+    </p:spTree>
+  </p:cSld>
+  <p:clrMapOvr>
+    <a:masterClrMapping/>
+  </p:clrMapOvr>
+</p:notes>
+</file>
+
+<file path=ppt/notesSlides/notesSlide11.xml><?xml version="1.0" encoding="utf-8"?>
+<p:notes xmlns:a="http://schemas.openxmlformats.org/drawingml/2006/main" xmlns:p="http://schemas.openxmlformats.org/presentationml/2006/main" xmlns:r="http://schemas.openxmlformats.org/officeDocument/2006/relationships">
+  <p:cSld>
+    <p:spTree>
+      <p:nvGrpSpPr>
+        <p:cNvPr id="1" name=""/>
+        <p:cNvGrpSpPr/>
+        <p:nvPr/>
+      </p:nvGrpSpPr>
+      <p:grpSpPr>
+        <a:xfrm>
+          <a:off x="0" y="0"/>
+          <a:ext cx="0" cy="0"/>
+          <a:chOff x="0" y="0"/>
+          <a:chExt cx="0" cy="0"/>
+        </a:xfrm>
+      </p:grpSpPr>
+      <p:sp>
+        <p:nvSpPr>
+          <p:cNvPr id="2" name="讲课提示"/>
+          <p:cNvSpPr txBox="1"/>
+          <p:nvPr/>
+        </p:nvSpPr>
+        <p:spPr>
+          <a:xfrm>
+            <a:off x="457200" y="457200"/>
+            <a:ext cx="6858000" cy="4800600"/>
+          </a:xfrm>
+          <a:prstGeom prst="rect">
+            <a:avLst/>
+          </a:prstGeom>
+        </p:spPr>
+        <p:txBody>
+          <a:bodyPr wrap="square"/>
+          <a:lstStyle/>
+          <a:p>
+            <a:r>
+              <a:rPr lang="zh-CN" dirty="0"/>
+              <a:t>第 83 节 · 核心知识点：Plotly 掷骰子与动手实战</a:t>
+            </a:r>
+          </a:p>
+          <a:p>
+            <a:r>
+              <a:rPr lang="zh-CN" dirty="0"/>
+              <a:t/>
+            </a:r>
+          </a:p>
+          <a:p>
+            <a:r>
+              <a:rPr lang="zh-CN" dirty="0"/>
+              <a:t>讲这一页时：先让学生说出上节课的结论，再逐块讲要点。</a:t>
+            </a:r>
+          </a:p>
+          <a:p>
+            <a:r>
+              <a:rPr lang="zh-CN" dirty="0"/>
+              <a:t>每讲完一块，问一句「这一步如果写错了，报错会长什么样？」——把错误提前讲。</a:t>
+            </a:r>
+          </a:p>
+          <a:p>
+            <a:r>
+              <a:rPr lang="zh-CN" dirty="0"/>
+              <a:t/>
+            </a:r>
+          </a:p>
+          <a:p>
+            <a:r>
+              <a:rPr lang="zh-CN" dirty="0"/>
+              <a:t>本节目标：会用 Plotly 的 Die 类与 px.bar 画直方图；能比较两个骰子的分布</a:t>
+            </a:r>
+          </a:p>
+          <a:p>
+            <a:r>
+              <a:rPr lang="zh-CN" dirty="0"/>
+              <a:t/>
+            </a:r>
+          </a:p>
+          <a:p>
+            <a:r>
+              <a:rPr lang="zh-CN" dirty="0"/>
+              <a:t>看不到懂的地方，回讲义对应小节读一遍，再回来对着这页复述一次——能讲出来才算真懂。</a:t>
+            </a:r>
+          </a:p>
+        </p:txBody>
+      </p:sp>
+    </p:spTree>
+  </p:cSld>
+  <p:clrMapOvr>
+    <a:masterClrMapping/>
+  </p:clrMapOvr>
+</p:notes>
+</file>
+
+<file path=ppt/notesSlides/notesSlide12.xml><?xml version="1.0" encoding="utf-8"?>
+<p:notes xmlns:a="http://schemas.openxmlformats.org/drawingml/2006/main" xmlns:p="http://schemas.openxmlformats.org/presentationml/2006/main" xmlns:r="http://schemas.openxmlformats.org/officeDocument/2006/relationships">
+  <p:cSld>
+    <p:spTree>
+      <p:nvGrpSpPr>
+        <p:cNvPr id="1" name=""/>
+        <p:cNvGrpSpPr/>
+        <p:nvPr/>
+      </p:nvGrpSpPr>
+      <p:grpSpPr>
+        <a:xfrm>
+          <a:off x="0" y="0"/>
+          <a:ext cx="0" cy="0"/>
+          <a:chOff x="0" y="0"/>
+          <a:chExt cx="0" cy="0"/>
+        </a:xfrm>
+      </p:grpSpPr>
+      <p:sp>
+        <p:nvSpPr>
+          <p:cNvPr id="2" name="讲课提示"/>
+          <p:cNvSpPr txBox="1"/>
+          <p:nvPr/>
+        </p:nvSpPr>
+        <p:spPr>
+          <a:xfrm>
+            <a:off x="457200" y="457200"/>
+            <a:ext cx="6858000" cy="4800600"/>
+          </a:xfrm>
+          <a:prstGeom prst="rect">
+            <a:avLst/>
+          </a:prstGeom>
+        </p:spPr>
+        <p:txBody>
+          <a:bodyPr wrap="square"/>
+          <a:lstStyle/>
+          <a:p>
+            <a:r>
+              <a:rPr lang="zh-CN" dirty="0"/>
+              <a:t>单元 15 小结 · 单元 15 · 小结</a:t>
+            </a:r>
+          </a:p>
+          <a:p>
+            <a:r>
+              <a:rPr lang="zh-CN" dirty="0"/>
+              <a:t/>
+            </a:r>
+          </a:p>
+          <a:p>
+            <a:r>
+              <a:rPr lang="zh-CN" dirty="0"/>
+              <a:t>收尾动作：让学生合上讲义，口述本单元三个最重要的结论；说不出来的，回对应课节。</a:t>
+            </a:r>
+          </a:p>
+          <a:p>
+            <a:r>
+              <a:rPr lang="zh-CN" dirty="0"/>
+              <a:t>然后当场勾一遍本单元课节的「已完成」，没打勾的进下一单元前补掉。</a:t>
+            </a:r>
+          </a:p>
+        </p:txBody>
+      </p:sp>
+    </p:spTree>
+  </p:cSld>
+  <p:clrMapOvr>
+    <a:masterClrMapping/>
+  </p:clrMapOvr>
+</p:notes>
+</file>
+
+<file path=ppt/notesSlides/notesSlide2.xml><?xml version="1.0" encoding="utf-8"?>
+<p:notes xmlns:a="http://schemas.openxmlformats.org/drawingml/2006/main" xmlns:p="http://schemas.openxmlformats.org/presentationml/2006/main" xmlns:r="http://schemas.openxmlformats.org/officeDocument/2006/relationships">
+  <p:cSld>
+    <p:spTree>
+      <p:nvGrpSpPr>
+        <p:cNvPr id="1" name=""/>
+        <p:cNvGrpSpPr/>
+        <p:nvPr/>
+      </p:nvGrpSpPr>
+      <p:grpSpPr>
+        <a:xfrm>
+          <a:off x="0" y="0"/>
+          <a:ext cx="0" cy="0"/>
+          <a:chOff x="0" y="0"/>
+          <a:chExt cx="0" cy="0"/>
+        </a:xfrm>
+      </p:grpSpPr>
+      <p:sp>
+        <p:nvSpPr>
+          <p:cNvPr id="2" name="讲课提示"/>
+          <p:cNvSpPr txBox="1"/>
+          <p:nvPr/>
+        </p:nvSpPr>
+        <p:spPr>
+          <a:xfrm>
+            <a:off x="457200" y="457200"/>
+            <a:ext cx="6858000" cy="4800600"/>
+          </a:xfrm>
+          <a:prstGeom prst="rect">
+            <a:avLst/>
+          </a:prstGeom>
+        </p:spPr>
+        <p:txBody>
+          <a:bodyPr wrap="square"/>
+          <a:lstStyle/>
+          <a:p>
+            <a:r>
+              <a:rPr lang="zh-CN" dirty="0"/>
+              <a:t>第 79 节 · Matplotlib 入门与折线图</a:t>
+            </a:r>
+          </a:p>
+          <a:p>
+            <a:r>
+              <a:rPr lang="zh-CN" dirty="0"/>
+              <a:t>单元 15 · Matplotlib 生成数据 · W18</a:t>
+            </a:r>
+          </a:p>
+          <a:p>
+            <a:r>
+              <a:rPr lang="zh-CN" dirty="0"/>
+              <a:t/>
+            </a:r>
+          </a:p>
+          <a:p>
+            <a:r>
+              <a:rPr lang="zh-CN" dirty="0"/>
+              <a:t>学习目标：会用 `fig, ax = plt.subplots()` 画折线图；知道为什么该用面向对象写法</a:t>
+            </a:r>
+          </a:p>
+          <a:p>
+            <a:r>
+              <a:rPr lang="zh-CN" dirty="0"/>
+              <a:t/>
+            </a:r>
+          </a:p>
+          <a:p>
+            <a:r>
+              <a:rPr lang="zh-CN" dirty="0"/>
+              <a:t>课堂实操（40 分钟，不看答案）：</a:t>
+            </a:r>
+          </a:p>
+          <a:p>
+            <a:r>
+              <a:rPr lang="zh-CN" dirty="0"/>
+              <a:t>· 画出第一条折线图并加标签</a:t>
+            </a:r>
+          </a:p>
+          <a:p>
+            <a:r>
+              <a:rPr lang="zh-CN" dirty="0"/>
+              <a:t>· 把 plt.plot() 写法改成 fig, ax 写法对比</a:t>
+            </a:r>
+          </a:p>
+          <a:p>
+            <a:r>
+              <a:rPr lang="zh-CN" dirty="0"/>
+              <a:t/>
+            </a:r>
+          </a:p>
+          <a:p>
+            <a:r>
+              <a:rPr lang="zh-CN" dirty="0"/>
+              <a:t>课后作业：</a:t>
+            </a:r>
+          </a:p>
+          <a:p>
+            <a:r>
+              <a:rPr lang="zh-CN" dirty="0"/>
+              <a:t>· 装好 matplotlib 并画出第一张图</a:t>
+            </a:r>
+          </a:p>
+          <a:p>
+            <a:r>
+              <a:rPr lang="zh-CN" dirty="0"/>
+              <a:t/>
+            </a:r>
+          </a:p>
+          <a:p>
+            <a:r>
+              <a:rPr lang="zh-CN" dirty="0"/>
+              <a:t>节奏：讲 20 分钟 → 学员自己敲 40 分钟（不看答案）→ 对讲评自查 20 分钟 → 写作业 10 分钟。</a:t>
+            </a:r>
+          </a:p>
+        </p:txBody>
+      </p:sp>
+    </p:spTree>
+  </p:cSld>
+  <p:clrMapOvr>
+    <a:masterClrMapping/>
+  </p:clrMapOvr>
+</p:notes>
+</file>
+
+<file path=ppt/notesSlides/notesSlide3.xml><?xml version="1.0" encoding="utf-8"?>
+<p:notes xmlns:a="http://schemas.openxmlformats.org/drawingml/2006/main" xmlns:p="http://schemas.openxmlformats.org/presentationml/2006/main" xmlns:r="http://schemas.openxmlformats.org/officeDocument/2006/relationships">
+  <p:cSld>
+    <p:spTree>
+      <p:nvGrpSpPr>
+        <p:cNvPr id="1" name=""/>
+        <p:cNvGrpSpPr/>
+        <p:nvPr/>
+      </p:nvGrpSpPr>
+      <p:grpSpPr>
+        <a:xfrm>
+          <a:off x="0" y="0"/>
+          <a:ext cx="0" cy="0"/>
+          <a:chOff x="0" y="0"/>
+          <a:chExt cx="0" cy="0"/>
+        </a:xfrm>
+      </p:grpSpPr>
+      <p:sp>
+        <p:nvSpPr>
+          <p:cNvPr id="2" name="讲课提示"/>
+          <p:cNvSpPr txBox="1"/>
+          <p:nvPr/>
+        </p:nvSpPr>
+        <p:spPr>
+          <a:xfrm>
+            <a:off x="457200" y="457200"/>
+            <a:ext cx="6858000" cy="4800600"/>
+          </a:xfrm>
+          <a:prstGeom prst="rect">
+            <a:avLst/>
+          </a:prstGeom>
+        </p:spPr>
+        <p:txBody>
+          <a:bodyPr wrap="square"/>
+          <a:lstStyle/>
+          <a:p>
+            <a:r>
+              <a:rPr lang="zh-CN" dirty="0"/>
+              <a:t>第 79 节 · 核心知识点：Matplotlib 入门与折线图</a:t>
+            </a:r>
+          </a:p>
+          <a:p>
+            <a:r>
+              <a:rPr lang="zh-CN" dirty="0"/>
+              <a:t/>
+            </a:r>
+          </a:p>
+          <a:p>
+            <a:r>
+              <a:rPr lang="zh-CN" dirty="0"/>
+              <a:t>讲这一页时：先让学生说出上节课的结论，再逐块讲要点。</a:t>
+            </a:r>
+          </a:p>
+          <a:p>
+            <a:r>
+              <a:rPr lang="zh-CN" dirty="0"/>
+              <a:t>每讲完一块，问一句「这一步如果写错了，报错会长什么样？」——把错误提前讲。</a:t>
+            </a:r>
+          </a:p>
+          <a:p>
+            <a:r>
+              <a:rPr lang="zh-CN" dirty="0"/>
+              <a:t/>
+            </a:r>
+          </a:p>
+          <a:p>
+            <a:r>
+              <a:rPr lang="zh-CN" dirty="0"/>
+              <a:t>本节目标：会用 `fig, ax = plt.subplots()` 画折线图；知道为什么该用面向对象写法</a:t>
+            </a:r>
+          </a:p>
+          <a:p>
+            <a:r>
+              <a:rPr lang="zh-CN" dirty="0"/>
+              <a:t/>
+            </a:r>
+          </a:p>
+          <a:p>
+            <a:r>
+              <a:rPr lang="zh-CN" dirty="0"/>
+              <a:t>看不到懂的地方，回讲义对应小节读一遍，再回来对着这页复述一次——能讲出来才算真懂。</a:t>
+            </a:r>
+          </a:p>
+        </p:txBody>
+      </p:sp>
+    </p:spTree>
+  </p:cSld>
+  <p:clrMapOvr>
+    <a:masterClrMapping/>
+  </p:clrMapOvr>
+</p:notes>
+</file>
+
+<file path=ppt/notesSlides/notesSlide4.xml><?xml version="1.0" encoding="utf-8"?>
+<p:notes xmlns:a="http://schemas.openxmlformats.org/drawingml/2006/main" xmlns:p="http://schemas.openxmlformats.org/presentationml/2006/main" xmlns:r="http://schemas.openxmlformats.org/officeDocument/2006/relationships">
+  <p:cSld>
+    <p:spTree>
+      <p:nvGrpSpPr>
+        <p:cNvPr id="1" name=""/>
+        <p:cNvGrpSpPr/>
+        <p:nvPr/>
+      </p:nvGrpSpPr>
+      <p:grpSpPr>
+        <a:xfrm>
+          <a:off x="0" y="0"/>
+          <a:ext cx="0" cy="0"/>
+          <a:chOff x="0" y="0"/>
+          <a:chExt cx="0" cy="0"/>
+        </a:xfrm>
+      </p:grpSpPr>
+      <p:sp>
+        <p:nvSpPr>
+          <p:cNvPr id="2" name="讲课提示"/>
+          <p:cNvSpPr txBox="1"/>
+          <p:nvPr/>
+        </p:nvSpPr>
+        <p:spPr>
+          <a:xfrm>
+            <a:off x="457200" y="457200"/>
+            <a:ext cx="6858000" cy="4800600"/>
+          </a:xfrm>
+          <a:prstGeom prst="rect">
+            <a:avLst/>
+          </a:prstGeom>
+        </p:spPr>
+        <p:txBody>
+          <a:bodyPr wrap="square"/>
+          <a:lstStyle/>
+          <a:p>
+            <a:r>
+              <a:rPr lang="zh-CN" dirty="0"/>
+              <a:t>第 80 节 · 散点图与自动计算数据</a:t>
+            </a:r>
+          </a:p>
+          <a:p>
+            <a:r>
+              <a:rPr lang="zh-CN" dirty="0"/>
+              <a:t>单元 15 · Matplotlib 生成数据 · W18</a:t>
+            </a:r>
+          </a:p>
+          <a:p>
+            <a:r>
+              <a:rPr lang="zh-CN" dirty="0"/>
+              <a:t/>
+            </a:r>
+          </a:p>
+          <a:p>
+            <a:r>
+              <a:rPr lang="zh-CN" dirty="0"/>
+              <a:t>学习目标：掌握 scatter 的 s / c 两件套；会生成随机数据</a:t>
+            </a:r>
+          </a:p>
+          <a:p>
+            <a:r>
+              <a:rPr lang="zh-CN" dirty="0"/>
+              <a:t/>
+            </a:r>
+          </a:p>
+          <a:p>
+            <a:r>
+              <a:rPr lang="zh-CN" dirty="0"/>
+              <a:t>课堂实操（40 分钟，不看答案）：</a:t>
+            </a:r>
+          </a:p>
+          <a:p>
+            <a:r>
+              <a:rPr lang="zh-CN" dirty="0"/>
+              <a:t>· 画一张散点图并设置点大小</a:t>
+            </a:r>
+          </a:p>
+          <a:p>
+            <a:r>
+              <a:rPr lang="zh-CN" dirty="0"/>
+              <a:t>· 故意不设 s，看点为什么看起来一样大</a:t>
+            </a:r>
+          </a:p>
+          <a:p>
+            <a:r>
+              <a:rPr lang="zh-CN" dirty="0"/>
+              <a:t/>
+            </a:r>
+          </a:p>
+          <a:p>
+            <a:r>
+              <a:rPr lang="zh-CN" dirty="0"/>
+              <a:t>课后作业：</a:t>
+            </a:r>
+          </a:p>
+          <a:p>
+            <a:r>
+              <a:rPr lang="zh-CN" dirty="0"/>
+              <a:t>· 完成教材 15.2.4–15.2.6 动手练</a:t>
+            </a:r>
+          </a:p>
+          <a:p>
+            <a:r>
+              <a:rPr lang="zh-CN" dirty="0"/>
+              <a:t/>
+            </a:r>
+          </a:p>
+          <a:p>
+            <a:r>
+              <a:rPr lang="zh-CN" dirty="0"/>
+              <a:t>节奏：讲 20 分钟 → 学员自己敲 40 分钟（不看答案）→ 对讲评自查 20 分钟 → 写作业 10 分钟。</a:t>
+            </a:r>
+          </a:p>
+        </p:txBody>
+      </p:sp>
+    </p:spTree>
+  </p:cSld>
+  <p:clrMapOvr>
+    <a:masterClrMapping/>
+  </p:clrMapOvr>
+</p:notes>
+</file>
+
+<file path=ppt/notesSlides/notesSlide5.xml><?xml version="1.0" encoding="utf-8"?>
+<p:notes xmlns:a="http://schemas.openxmlformats.org/drawingml/2006/main" xmlns:p="http://schemas.openxmlformats.org/presentationml/2006/main" xmlns:r="http://schemas.openxmlformats.org/officeDocument/2006/relationships">
+  <p:cSld>
+    <p:spTree>
+      <p:nvGrpSpPr>
+        <p:cNvPr id="1" name=""/>
+        <p:cNvGrpSpPr/>
+        <p:nvPr/>
+      </p:nvGrpSpPr>
+      <p:grpSpPr>
+        <a:xfrm>
+          <a:off x="0" y="0"/>
+          <a:ext cx="0" cy="0"/>
+          <a:chOff x="0" y="0"/>
+          <a:chExt cx="0" cy="0"/>
+        </a:xfrm>
+      </p:grpSpPr>
+      <p:sp>
+        <p:nvSpPr>
+          <p:cNvPr id="2" name="讲课提示"/>
+          <p:cNvSpPr txBox="1"/>
+          <p:nvPr/>
+        </p:nvSpPr>
+        <p:spPr>
+          <a:xfrm>
+            <a:off x="457200" y="457200"/>
+            <a:ext cx="6858000" cy="4800600"/>
+          </a:xfrm>
+          <a:prstGeom prst="rect">
+            <a:avLst/>
+          </a:prstGeom>
+        </p:spPr>
+        <p:txBody>
+          <a:bodyPr wrap="square"/>
+          <a:lstStyle/>
+          <a:p>
+            <a:r>
+              <a:rPr lang="zh-CN" dirty="0"/>
+              <a:t>第 80 节 · 核心知识点：散点图与自动计算数据</a:t>
+            </a:r>
+          </a:p>
+          <a:p>
+            <a:r>
+              <a:rPr lang="zh-CN" dirty="0"/>
+              <a:t/>
+            </a:r>
+          </a:p>
+          <a:p>
+            <a:r>
+              <a:rPr lang="zh-CN" dirty="0"/>
+              <a:t>讲这一页时：先让学生说出上节课的结论，再逐块讲要点。</a:t>
+            </a:r>
+          </a:p>
+          <a:p>
+            <a:r>
+              <a:rPr lang="zh-CN" dirty="0"/>
+              <a:t>每讲完一块，问一句「这一步如果写错了，报错会长什么样？」——把错误提前讲。</a:t>
+            </a:r>
+          </a:p>
+          <a:p>
+            <a:r>
+              <a:rPr lang="zh-CN" dirty="0"/>
+              <a:t/>
+            </a:r>
+          </a:p>
+          <a:p>
+            <a:r>
+              <a:rPr lang="zh-CN" dirty="0"/>
+              <a:t>本节目标：掌握 scatter 的 s / c 两件套；会生成随机数据</a:t>
+            </a:r>
+          </a:p>
+          <a:p>
+            <a:r>
+              <a:rPr lang="zh-CN" dirty="0"/>
+              <a:t/>
+            </a:r>
+          </a:p>
+          <a:p>
+            <a:r>
+              <a:rPr lang="zh-CN" dirty="0"/>
+              <a:t>看不到懂的地方，回讲义对应小节读一遍，再回来对着这页复述一次——能讲出来才算真懂。</a:t>
+            </a:r>
+          </a:p>
+        </p:txBody>
+      </p:sp>
+    </p:spTree>
+  </p:cSld>
+  <p:clrMapOvr>
+    <a:masterClrMapping/>
+  </p:clrMapOvr>
+</p:notes>
+</file>
+
+<file path=ppt/notesSlides/notesSlide6.xml><?xml version="1.0" encoding="utf-8"?>
+<p:notes xmlns:a="http://schemas.openxmlformats.org/drawingml/2006/main" xmlns:p="http://schemas.openxmlformats.org/presentationml/2006/main" xmlns:r="http://schemas.openxmlformats.org/officeDocument/2006/relationships">
+  <p:cSld>
+    <p:spTree>
+      <p:nvGrpSpPr>
+        <p:cNvPr id="1" name=""/>
+        <p:cNvGrpSpPr/>
+        <p:nvPr/>
+      </p:nvGrpSpPr>
+      <p:grpSpPr>
+        <a:xfrm>
+          <a:off x="0" y="0"/>
+          <a:ext cx="0" cy="0"/>
+          <a:chOff x="0" y="0"/>
+          <a:chExt cx="0" cy="0"/>
+        </a:xfrm>
+      </p:grpSpPr>
+      <p:sp>
+        <p:nvSpPr>
+          <p:cNvPr id="2" name="讲课提示"/>
+          <p:cNvSpPr txBox="1"/>
+          <p:nvPr/>
+        </p:nvSpPr>
+        <p:spPr>
+          <a:xfrm>
+            <a:off x="457200" y="457200"/>
+            <a:ext cx="6858000" cy="4800600"/>
+          </a:xfrm>
+          <a:prstGeom prst="rect">
+            <a:avLst/>
+          </a:prstGeom>
+        </p:spPr>
+        <p:txBody>
+          <a:bodyPr wrap="square"/>
+          <a:lstStyle/>
+          <a:p>
+            <a:r>
+              <a:rPr lang="zh-CN" dirty="0"/>
+              <a:t>第 81 节 · ★ 校正绘图、刻度与颜色映射</a:t>
+            </a:r>
+          </a:p>
+          <a:p>
+            <a:r>
+              <a:rPr lang="zh-CN" dirty="0"/>
+              <a:t>单元 15 · Matplotlib 生成数据 · W18–W19</a:t>
+            </a:r>
+          </a:p>
+          <a:p>
+            <a:r>
+              <a:rPr lang="zh-CN" dirty="0"/>
+              <a:t/>
+            </a:r>
+          </a:p>
+          <a:p>
+            <a:r>
+              <a:rPr lang="zh-CN" dirty="0"/>
+              <a:t>学习目标：会用 `axis()` 留边距（最高频的坑）；会定制刻度、颜色与颜色映射</a:t>
+            </a:r>
+          </a:p>
+          <a:p>
+            <a:r>
+              <a:rPr lang="zh-CN" dirty="0"/>
+              <a:t/>
+            </a:r>
+          </a:p>
+          <a:p>
+            <a:r>
+              <a:rPr lang="zh-CN" dirty="0"/>
+              <a:t>课堂实操（40 分钟，不看答案）：</a:t>
+            </a:r>
+          </a:p>
+          <a:p>
+            <a:r>
+              <a:rPr lang="zh-CN" dirty="0"/>
+              <a:t>· ★ 现场演示不调 axis() 时点被裁掉</a:t>
+            </a:r>
+          </a:p>
+          <a:p>
+            <a:r>
+              <a:rPr lang="zh-CN" dirty="0"/>
+              <a:t>· 用 Blues 渐变画散点图</a:t>
+            </a:r>
+          </a:p>
+          <a:p>
+            <a:r>
+              <a:rPr lang="zh-CN" dirty="0"/>
+              <a:t/>
+            </a:r>
+          </a:p>
+          <a:p>
+            <a:r>
+              <a:rPr lang="zh-CN" dirty="0"/>
+              <a:t>课后作业：</a:t>
+            </a:r>
+          </a:p>
+          <a:p>
+            <a:r>
+              <a:rPr lang="zh-CN" dirty="0"/>
+              <a:t>· 完成教材 15.2.7–15.2.10 动手练</a:t>
+            </a:r>
+          </a:p>
+          <a:p>
+            <a:r>
+              <a:rPr lang="zh-CN" dirty="0"/>
+              <a:t/>
+            </a:r>
+          </a:p>
+          <a:p>
+            <a:r>
+              <a:rPr lang="zh-CN" dirty="0"/>
+              <a:t>节奏：讲 20 分钟 → 学员自己敲 40 分钟（不看答案）→ 对讲评自查 20 分钟 → 写作业 10 分钟。</a:t>
+            </a:r>
+          </a:p>
+        </p:txBody>
+      </p:sp>
+    </p:spTree>
+  </p:cSld>
+  <p:clrMapOvr>
+    <a:masterClrMapping/>
+  </p:clrMapOvr>
+</p:notes>
+</file>
+
+<file path=ppt/notesSlides/notesSlide7.xml><?xml version="1.0" encoding="utf-8"?>
+<p:notes xmlns:a="http://schemas.openxmlformats.org/drawingml/2006/main" xmlns:p="http://schemas.openxmlformats.org/presentationml/2006/main" xmlns:r="http://schemas.openxmlformats.org/officeDocument/2006/relationships">
+  <p:cSld>
+    <p:spTree>
+      <p:nvGrpSpPr>
+        <p:cNvPr id="1" name=""/>
+        <p:cNvGrpSpPr/>
+        <p:nvPr/>
+      </p:nvGrpSpPr>
+      <p:grpSpPr>
+        <a:xfrm>
+          <a:off x="0" y="0"/>
+          <a:ext cx="0" cy="0"/>
+          <a:chOff x="0" y="0"/>
+          <a:chExt cx="0" cy="0"/>
+        </a:xfrm>
+      </p:grpSpPr>
+      <p:sp>
+        <p:nvSpPr>
+          <p:cNvPr id="2" name="讲课提示"/>
+          <p:cNvSpPr txBox="1"/>
+          <p:nvPr/>
+        </p:nvSpPr>
+        <p:spPr>
+          <a:xfrm>
+            <a:off x="457200" y="457200"/>
+            <a:ext cx="6858000" cy="4800600"/>
+          </a:xfrm>
+          <a:prstGeom prst="rect">
+            <a:avLst/>
+          </a:prstGeom>
+        </p:spPr>
+        <p:txBody>
+          <a:bodyPr wrap="square"/>
+          <a:lstStyle/>
+          <a:p>
+            <a:r>
+              <a:rPr lang="zh-CN" dirty="0"/>
+              <a:t>第 81 节 · 核心知识点：★ 校正绘图、刻度与颜色映射</a:t>
+            </a:r>
+          </a:p>
+          <a:p>
+            <a:r>
+              <a:rPr lang="zh-CN" dirty="0"/>
+              <a:t/>
+            </a:r>
+          </a:p>
+          <a:p>
+            <a:r>
+              <a:rPr lang="zh-CN" dirty="0"/>
+              <a:t>讲这一页时：先让学生说出上节课的结论，再逐块讲要点。</a:t>
+            </a:r>
+          </a:p>
+          <a:p>
+            <a:r>
+              <a:rPr lang="zh-CN" dirty="0"/>
+              <a:t>每讲完一块，问一句「这一步如果写错了，报错会长什么样？」——把错误提前讲。</a:t>
+            </a:r>
+          </a:p>
+          <a:p>
+            <a:r>
+              <a:rPr lang="zh-CN" dirty="0"/>
+              <a:t/>
+            </a:r>
+          </a:p>
+          <a:p>
+            <a:r>
+              <a:rPr lang="zh-CN" dirty="0"/>
+              <a:t>本节目标：会用 `axis()` 留边距（最高频的坑）；会定制刻度、颜色与颜色映射</a:t>
+            </a:r>
+          </a:p>
+          <a:p>
+            <a:r>
+              <a:rPr lang="zh-CN" dirty="0"/>
+              <a:t/>
+            </a:r>
+          </a:p>
+          <a:p>
+            <a:r>
+              <a:rPr lang="zh-CN" dirty="0"/>
+              <a:t>看不到懂的地方，回讲义对应小节读一遍，再回来对着这页复述一次——能讲出来才算真懂。</a:t>
+            </a:r>
+          </a:p>
+        </p:txBody>
+      </p:sp>
+    </p:spTree>
+  </p:cSld>
+  <p:clrMapOvr>
+    <a:masterClrMapping/>
+  </p:clrMapOvr>
+</p:notes>
+</file>
+
+<file path=ppt/notesSlides/notesSlide8.xml><?xml version="1.0" encoding="utf-8"?>
+<p:notes xmlns:a="http://schemas.openxmlformats.org/drawingml/2006/main" xmlns:p="http://schemas.openxmlformats.org/presentationml/2006/main" xmlns:r="http://schemas.openxmlformats.org/officeDocument/2006/relationships">
+  <p:cSld>
+    <p:spTree>
+      <p:nvGrpSpPr>
+        <p:cNvPr id="1" name=""/>
+        <p:cNvGrpSpPr/>
+        <p:nvPr/>
+      </p:nvGrpSpPr>
+      <p:grpSpPr>
+        <a:xfrm>
+          <a:off x="0" y="0"/>
+          <a:ext cx="0" cy="0"/>
+          <a:chOff x="0" y="0"/>
+          <a:chExt cx="0" cy="0"/>
+        </a:xfrm>
+      </p:grpSpPr>
+      <p:sp>
+        <p:nvSpPr>
+          <p:cNvPr id="2" name="讲课提示"/>
+          <p:cNvSpPr txBox="1"/>
+          <p:nvPr/>
+        </p:nvSpPr>
+        <p:spPr>
+          <a:xfrm>
+            <a:off x="457200" y="457200"/>
+            <a:ext cx="6858000" cy="4800600"/>
+          </a:xfrm>
+          <a:prstGeom prst="rect">
+            <a:avLst/>
+          </a:prstGeom>
+        </p:spPr>
+        <p:txBody>
+          <a:bodyPr wrap="square"/>
+          <a:lstStyle/>
+          <a:p>
+            <a:r>
+              <a:rPr lang="zh-CN" dirty="0"/>
+              <a:t>第 82 节 · 随机游走 RandomWalk 类</a:t>
+            </a:r>
+          </a:p>
+          <a:p>
+            <a:r>
+              <a:rPr lang="zh-CN" dirty="0"/>
+              <a:t>单元 15 · Matplotlib 生成数据 · W19</a:t>
+            </a:r>
+          </a:p>
+          <a:p>
+            <a:r>
+              <a:rPr lang="zh-CN" dirty="0"/>
+              <a:t/>
+            </a:r>
+          </a:p>
+          <a:p>
+            <a:r>
+              <a:rPr lang="zh-CN" dirty="0"/>
+              <a:t>学习目标：能写 RandomWalk 类并模拟多次游走；理解 fill_walk 拒绝原地不动的逻辑</a:t>
+            </a:r>
+          </a:p>
+          <a:p>
+            <a:r>
+              <a:rPr lang="zh-CN" dirty="0"/>
+              <a:t/>
+            </a:r>
+          </a:p>
+          <a:p>
+            <a:r>
+              <a:rPr lang="zh-CN" dirty="0"/>
+              <a:t>课堂实操（40 分钟，不看答案）：</a:t>
+            </a:r>
+          </a:p>
+          <a:p>
+            <a:r>
+              <a:rPr lang="zh-CN" dirty="0"/>
+              <a:t>· 实现 fill_walk 并画一条路径</a:t>
+            </a:r>
+          </a:p>
+          <a:p>
+            <a:r>
+              <a:rPr lang="zh-CN" dirty="0"/>
+              <a:t>· 模拟 5000 条路径，保存成 PNG</a:t>
+            </a:r>
+          </a:p>
+          <a:p>
+            <a:r>
+              <a:rPr lang="zh-CN" dirty="0"/>
+              <a:t/>
+            </a:r>
+          </a:p>
+          <a:p>
+            <a:r>
+              <a:rPr lang="zh-CN" dirty="0"/>
+              <a:t>课后作业：</a:t>
+            </a:r>
+          </a:p>
+          <a:p>
+            <a:r>
+              <a:rPr lang="zh-CN" dirty="0"/>
+              <a:t>· ★ 产出：随机游走图脚本</a:t>
+            </a:r>
+          </a:p>
+          <a:p>
+            <a:r>
+              <a:rPr lang="zh-CN" dirty="0"/>
+              <a:t/>
+            </a:r>
+          </a:p>
+          <a:p>
+            <a:r>
+              <a:rPr lang="zh-CN" dirty="0"/>
+              <a:t>节奏：讲 20 分钟 → 学员自己敲 40 分钟（不看答案）→ 对讲评自查 20 分钟 → 写作业 10 分钟。</a:t>
+            </a:r>
+          </a:p>
+        </p:txBody>
+      </p:sp>
+    </p:spTree>
+  </p:cSld>
+  <p:clrMapOvr>
+    <a:masterClrMapping/>
+  </p:clrMapOvr>
+</p:notes>
+</file>
+
+<file path=ppt/notesSlides/notesSlide9.xml><?xml version="1.0" encoding="utf-8"?>
+<p:notes xmlns:a="http://schemas.openxmlformats.org/drawingml/2006/main" xmlns:p="http://schemas.openxmlformats.org/presentationml/2006/main" xmlns:r="http://schemas.openxmlformats.org/officeDocument/2006/relationships">
+  <p:cSld>
+    <p:spTree>
+      <p:nvGrpSpPr>
+        <p:cNvPr id="1" name=""/>
+        <p:cNvGrpSpPr/>
+        <p:nvPr/>
+      </p:nvGrpSpPr>
+      <p:grpSpPr>
+        <a:xfrm>
+          <a:off x="0" y="0"/>
+          <a:ext cx="0" cy="0"/>
+          <a:chOff x="0" y="0"/>
+          <a:chExt cx="0" cy="0"/>
+        </a:xfrm>
+      </p:grpSpPr>
+      <p:sp>
+        <p:nvSpPr>
+          <p:cNvPr id="2" name="讲课提示"/>
+          <p:cNvSpPr txBox="1"/>
+          <p:nvPr/>
+        </p:nvSpPr>
+        <p:spPr>
+          <a:xfrm>
+            <a:off x="457200" y="457200"/>
+            <a:ext cx="6858000" cy="4800600"/>
+          </a:xfrm>
+          <a:prstGeom prst="rect">
+            <a:avLst/>
+          </a:prstGeom>
+        </p:spPr>
+        <p:txBody>
+          <a:bodyPr wrap="square"/>
+          <a:lstStyle/>
+          <a:p>
+            <a:r>
+              <a:rPr lang="zh-CN" dirty="0"/>
+              <a:t>第 82 节 · 核心知识点：随机游走 RandomWalk 类</a:t>
+            </a:r>
+          </a:p>
+          <a:p>
+            <a:r>
+              <a:rPr lang="zh-CN" dirty="0"/>
+              <a:t/>
+            </a:r>
+          </a:p>
+          <a:p>
+            <a:r>
+              <a:rPr lang="zh-CN" dirty="0"/>
+              <a:t>讲这一页时：先让学生说出上节课的结论，再逐块讲要点。</a:t>
+            </a:r>
+          </a:p>
+          <a:p>
+            <a:r>
+              <a:rPr lang="zh-CN" dirty="0"/>
+              <a:t>每讲完一块，问一句「这一步如果写错了，报错会长什么样？」——把错误提前讲。</a:t>
+            </a:r>
+          </a:p>
+          <a:p>
+            <a:r>
+              <a:rPr lang="zh-CN" dirty="0"/>
+              <a:t/>
+            </a:r>
+          </a:p>
+          <a:p>
+            <a:r>
+              <a:rPr lang="zh-CN" dirty="0"/>
+              <a:t>本节目标：能写 RandomWalk 类并模拟多次游走；理解 fill_walk 拒绝原地不动的逻辑</a:t>
+            </a:r>
+          </a:p>
+          <a:p>
+            <a:r>
+              <a:rPr lang="zh-CN" dirty="0"/>
+              <a:t/>
+            </a:r>
+          </a:p>
+          <a:p>
+            <a:r>
+              <a:rPr lang="zh-CN" dirty="0"/>
+              <a:t>看不到懂的地方，回讲义对应小节读一遍，再回来对着这页复述一次——能讲出来才算真懂。</a:t>
+            </a:r>
+          </a:p>
+        </p:txBody>
+      </p:sp>
+    </p:spTree>
+  </p:cSld>
+  <p:clrMapOvr>
+    <a:masterClrMapping/>
+  </p:clrMapOvr>
+</p:notes>
 </file>
 
 <file path=ppt/slideLayouts/slideLayout1.xml><?xml version="1.0" encoding="utf-8"?>
